--- a/docs/slides/week08/authentication.pptx
+++ b/docs/slides/week08/authentication.pptx
@@ -5,7 +5,7 @@
     <p:sldMasterId id="2147483648" r:id="rId1"/>
   </p:sldMasterIdLst>
   <p:notesMasterIdLst>
-    <p:notesMasterId r:id="rId28"/>
+    <p:notesMasterId r:id="rId55"/>
   </p:notesMasterIdLst>
   <p:sldIdLst>
     <p:sldId id="256" r:id="rId2"/>
@@ -34,29 +34,56 @@
     <p:sldId id="279" r:id="rId25"/>
     <p:sldId id="280" r:id="rId26"/>
     <p:sldId id="281" r:id="rId27"/>
+    <p:sldId id="282" r:id="rId28"/>
+    <p:sldId id="283" r:id="rId29"/>
+    <p:sldId id="294" r:id="rId30"/>
+    <p:sldId id="295" r:id="rId31"/>
+    <p:sldId id="296" r:id="rId32"/>
+    <p:sldId id="297" r:id="rId33"/>
+    <p:sldId id="298" r:id="rId34"/>
+    <p:sldId id="299" r:id="rId35"/>
+    <p:sldId id="300" r:id="rId36"/>
+    <p:sldId id="301" r:id="rId37"/>
+    <p:sldId id="302" r:id="rId38"/>
+    <p:sldId id="303" r:id="rId39"/>
+    <p:sldId id="304" r:id="rId40"/>
+    <p:sldId id="292" r:id="rId41"/>
+    <p:sldId id="293" r:id="rId42"/>
+    <p:sldId id="305" r:id="rId43"/>
+    <p:sldId id="306" r:id="rId44"/>
+    <p:sldId id="307" r:id="rId45"/>
+    <p:sldId id="308" r:id="rId46"/>
+    <p:sldId id="309" r:id="rId47"/>
+    <p:sldId id="310" r:id="rId48"/>
+    <p:sldId id="311" r:id="rId49"/>
+    <p:sldId id="312" r:id="rId50"/>
+    <p:sldId id="313" r:id="rId51"/>
+    <p:sldId id="314" r:id="rId52"/>
+    <p:sldId id="315" r:id="rId53"/>
+    <p:sldId id="316" r:id="rId54"/>
   </p:sldIdLst>
   <p:sldSz cx="12192000" cy="6858000"/>
   <p:notesSz cx="6858000" cy="9144000"/>
   <p:embeddedFontLst>
     <p:embeddedFont>
       <p:font typeface="Raleway" pitchFamily="2" charset="77"/>
-      <p:regular r:id="rId29"/>
-      <p:bold r:id="rId30"/>
-      <p:italic r:id="rId31"/>
-      <p:boldItalic r:id="rId32"/>
+      <p:regular r:id="rId56"/>
+      <p:bold r:id="rId57"/>
+      <p:italic r:id="rId58"/>
+      <p:boldItalic r:id="rId59"/>
     </p:embeddedFont>
     <p:embeddedFont>
       <p:font typeface="Raleway ExtraBold" pitchFamily="2" charset="77"/>
-      <p:bold r:id="rId33"/>
-      <p:italic r:id="rId34"/>
-      <p:boldItalic r:id="rId35"/>
+      <p:bold r:id="rId60"/>
+      <p:italic r:id="rId61"/>
+      <p:boldItalic r:id="rId62"/>
     </p:embeddedFont>
     <p:embeddedFont>
       <p:font typeface="Raleway SemiBold" pitchFamily="2" charset="77"/>
-      <p:regular r:id="rId36"/>
-      <p:bold r:id="rId37"/>
-      <p:italic r:id="rId38"/>
-      <p:boldItalic r:id="rId39"/>
+      <p:regular r:id="rId63"/>
+      <p:bold r:id="rId64"/>
+      <p:italic r:id="rId65"/>
+      <p:boldItalic r:id="rId66"/>
     </p:embeddedFont>
   </p:embeddedFontLst>
   <p:defaultTextStyle>
@@ -293,7 +320,7 @@
       <p15:sldGuideLst xmlns:p15="http://schemas.microsoft.com/office/powerpoint/2012/main"/>
     </p:ext>
     <p:ext uri="GoogleSlidesCustomDataVersion2">
-      <go:slidesCustomData xmlns:go="http://customooxmlschemas.google.com/" xmlns:ahyp="http://schemas.microsoft.com/office/drawing/2018/hyperlinkcolor" xmlns:p15="http://schemas.microsoft.com/office/powerpoint/2012/main" xmlns:p14="http://schemas.microsoft.com/office/powerpoint/2010/main" xmlns:com="http://schemas.openxmlformats.org/drawingml/2006/compatibility" xmlns:pvml="urn:schemas-microsoft-com:office:powerpoint" xmlns:v="urn:schemas-microsoft-com:vml" xmlns:o="urn:schemas-microsoft-com:office:office" xmlns:dgm="http://schemas.openxmlformats.org/drawingml/2006/diagram" xmlns:c="http://schemas.openxmlformats.org/drawingml/2006/chart" xmlns:mv="urn:schemas-microsoft-com:mac:vml" xmlns:mc="http://schemas.openxmlformats.org/markup-compatibility/2006" xmlns="" r:id="rId120" roundtripDataSignature="AMtx7mgJIPsVM9PdwC/BelE/w58o2aAl6w=="/>
+      <go:slidesCustomData xmlns="" xmlns:mc="http://schemas.openxmlformats.org/markup-compatibility/2006" xmlns:mv="urn:schemas-microsoft-com:mac:vml" xmlns:c="http://schemas.openxmlformats.org/drawingml/2006/chart" xmlns:dgm="http://schemas.openxmlformats.org/drawingml/2006/diagram" xmlns:o="urn:schemas-microsoft-com:office:office" xmlns:v="urn:schemas-microsoft-com:vml" xmlns:pvml="urn:schemas-microsoft-com:office:powerpoint" xmlns:com="http://schemas.openxmlformats.org/drawingml/2006/compatibility" xmlns:p14="http://schemas.microsoft.com/office/powerpoint/2010/main" xmlns:p15="http://schemas.microsoft.com/office/powerpoint/2012/main" xmlns:ahyp="http://schemas.microsoft.com/office/drawing/2018/hyperlinkcolor" xmlns:go="http://customooxmlschemas.google.com/" r:id="rId120" roundtripDataSignature="AMtx7mgJIPsVM9PdwC/BelE/w58o2aAl6w=="/>
     </p:ext>
   </p:extLst>
 </p:presentation>
@@ -7146,6 +7173,174 @@
 </p:sldLayout>
 </file>
 
+<file path=ppt/slideLayouts/slideLayout6.xml><?xml version="1.0" encoding="utf-8"?>
+<p:sldLayout xmlns:a="http://schemas.openxmlformats.org/drawingml/2006/main" xmlns:r="http://schemas.openxmlformats.org/officeDocument/2006/relationships" xmlns:p="http://schemas.openxmlformats.org/presentationml/2006/main" type="obj">
+  <p:cSld name="Title and Content">
+    <p:spTree>
+      <p:nvGrpSpPr>
+        <p:cNvPr id="1" name=""/>
+        <p:cNvGrpSpPr/>
+        <p:nvPr/>
+      </p:nvGrpSpPr>
+      <p:grpSpPr>
+        <a:xfrm>
+          <a:off x="0" y="0"/>
+          <a:ext cx="0" cy="0"/>
+          <a:chOff x="0" y="0"/>
+          <a:chExt cx="0" cy="0"/>
+        </a:xfrm>
+      </p:grpSpPr>
+      <p:sp>
+        <p:nvSpPr>
+          <p:cNvPr id="2" name="Title 1"/>
+          <p:cNvSpPr>
+            <a:spLocks noGrp="1"/>
+          </p:cNvSpPr>
+          <p:nvPr>
+            <p:ph type="title"/>
+          </p:nvPr>
+        </p:nvSpPr>
+        <p:spPr/>
+        <p:txBody>
+          <a:bodyPr/>
+          <a:lstStyle/>
+          <a:p>
+            <a:r>
+              <a:rPr lang="en-US"/>
+              <a:t>Click to edit Master title style</a:t>
+            </a:r>
+          </a:p>
+        </p:txBody>
+      </p:sp>
+      <p:sp>
+        <p:nvSpPr>
+          <p:cNvPr id="3" name="Content Placeholder 2"/>
+          <p:cNvSpPr>
+            <a:spLocks noGrp="1"/>
+          </p:cNvSpPr>
+          <p:nvPr>
+            <p:ph idx="1"/>
+          </p:nvPr>
+        </p:nvSpPr>
+        <p:spPr/>
+        <p:txBody>
+          <a:bodyPr/>
+          <a:lstStyle/>
+          <a:p>
+            <a:pPr lvl="0"/>
+            <a:r>
+              <a:rPr lang="en-US"/>
+              <a:t>Click to edit Master text styles</a:t>
+            </a:r>
+          </a:p>
+          <a:p>
+            <a:pPr lvl="1"/>
+            <a:r>
+              <a:rPr lang="en-US"/>
+              <a:t>Second level</a:t>
+            </a:r>
+          </a:p>
+          <a:p>
+            <a:pPr lvl="2"/>
+            <a:r>
+              <a:rPr lang="en-US"/>
+              <a:t>Third level</a:t>
+            </a:r>
+          </a:p>
+          <a:p>
+            <a:pPr lvl="3"/>
+            <a:r>
+              <a:rPr lang="en-US"/>
+              <a:t>Fourth level</a:t>
+            </a:r>
+          </a:p>
+          <a:p>
+            <a:pPr lvl="4"/>
+            <a:r>
+              <a:rPr lang="en-US"/>
+              <a:t>Fifth level</a:t>
+            </a:r>
+          </a:p>
+        </p:txBody>
+      </p:sp>
+      <p:sp>
+        <p:nvSpPr>
+          <p:cNvPr id="4" name="Date Placeholder 3"/>
+          <p:cNvSpPr>
+            <a:spLocks noGrp="1"/>
+          </p:cNvSpPr>
+          <p:nvPr>
+            <p:ph type="dt" sz="half" idx="10"/>
+          </p:nvPr>
+        </p:nvSpPr>
+        <p:spPr/>
+        <p:txBody>
+          <a:bodyPr/>
+          <a:lstStyle/>
+          <a:p>
+            <a:fld id="{5BCAD085-E8A6-8845-BD4E-CB4CCA059FC4}" type="datetimeFigureOut">
+              <a:rPr lang="en-US" smtClean="0"/>
+              <a:t>3/13/26</a:t>
+            </a:fld>
+            <a:endParaRPr lang="en-US"/>
+          </a:p>
+        </p:txBody>
+      </p:sp>
+      <p:sp>
+        <p:nvSpPr>
+          <p:cNvPr id="5" name="Footer Placeholder 4"/>
+          <p:cNvSpPr>
+            <a:spLocks noGrp="1"/>
+          </p:cNvSpPr>
+          <p:nvPr>
+            <p:ph type="ftr" sz="quarter" idx="11"/>
+          </p:nvPr>
+        </p:nvSpPr>
+        <p:spPr/>
+        <p:txBody>
+          <a:bodyPr/>
+          <a:lstStyle/>
+          <a:p>
+            <a:endParaRPr lang="en-US"/>
+          </a:p>
+        </p:txBody>
+      </p:sp>
+      <p:sp>
+        <p:nvSpPr>
+          <p:cNvPr id="6" name="Slide Number Placeholder 5"/>
+          <p:cNvSpPr>
+            <a:spLocks noGrp="1"/>
+          </p:cNvSpPr>
+          <p:nvPr>
+            <p:ph type="sldNum" sz="quarter" idx="12"/>
+          </p:nvPr>
+        </p:nvSpPr>
+        <p:spPr/>
+        <p:txBody>
+          <a:bodyPr/>
+          <a:lstStyle/>
+          <a:p>
+            <a:fld id="{C1FF6DA9-008F-8B48-92A6-B652298478BF}" type="slidenum">
+              <a:rPr lang="en-US" smtClean="0"/>
+              <a:t>‹#›</a:t>
+            </a:fld>
+            <a:endParaRPr lang="en-US"/>
+          </a:p>
+        </p:txBody>
+      </p:sp>
+    </p:spTree>
+    <p:extLst>
+      <p:ext uri="{BB962C8B-B14F-4D97-AF65-F5344CB8AC3E}">
+        <p14:creationId xmlns:p14="http://schemas.microsoft.com/office/powerpoint/2010/main" val="2253572318"/>
+      </p:ext>
+    </p:extLst>
+  </p:cSld>
+  <p:clrMapOvr>
+    <a:masterClrMapping/>
+  </p:clrMapOvr>
+</p:sldLayout>
+</file>
+
 <file path=ppt/slideMasters/slideMaster1.xml><?xml version="1.0" encoding="utf-8"?>
 <p:sldMaster xmlns:a="http://schemas.openxmlformats.org/drawingml/2006/main" xmlns:r="http://schemas.openxmlformats.org/officeDocument/2006/relationships" xmlns:p="http://schemas.openxmlformats.org/presentationml/2006/main">
   <p:cSld>
@@ -8533,6 +8728,7 @@
     <p:sldLayoutId id="2147483661" r:id="rId3"/>
     <p:sldLayoutId id="2147483662" r:id="rId4"/>
     <p:sldLayoutId id="2147483663" r:id="rId5"/>
+    <p:sldLayoutId id="2147483664" r:id="rId6"/>
   </p:sldLayoutIdLst>
   <p:hf hdr="0" ftr="0" dt="0"/>
   <p:txStyles>
@@ -9383,60 +9579,41 @@
           </a:ln>
         </p:spPr>
       </p:pic>
-      <p:pic>
-        <p:nvPicPr>
-          <p:cNvPr id="129" name="Google Shape;129;g389dc543835_0_2"/>
-          <p:cNvPicPr preferRelativeResize="0"/>
+      <p:sp>
+        <p:nvSpPr>
+          <p:cNvPr id="2" name="TextBox 1">
+            <a:extLst>
+              <a:ext uri="{FF2B5EF4-FFF2-40B4-BE49-F238E27FC236}">
+                <a16:creationId xmlns:a16="http://schemas.microsoft.com/office/drawing/2014/main" id="{DD8A339F-DD0C-D34F-9D50-768FA1361B40}"/>
+              </a:ext>
+            </a:extLst>
+          </p:cNvPr>
+          <p:cNvSpPr txBox="1"/>
           <p:nvPr/>
-        </p:nvPicPr>
-        <p:blipFill rotWithShape="1">
-          <a:blip r:embed="rId4">
-            <a:alphaModFix/>
-          </a:blip>
-          <a:srcRect/>
-          <a:stretch/>
-        </p:blipFill>
+        </p:nvSpPr>
         <p:spPr>
           <a:xfrm>
-            <a:off x="4466094" y="4255848"/>
-            <a:ext cx="2076569" cy="2086712"/>
+            <a:off x="4898572" y="4053762"/>
+            <a:ext cx="3799114" cy="584775"/>
           </a:xfrm>
           <a:prstGeom prst="rect">
             <a:avLst/>
           </a:prstGeom>
           <a:noFill/>
-          <a:ln>
-            <a:noFill/>
-          </a:ln>
         </p:spPr>
-      </p:pic>
-      <p:pic>
-        <p:nvPicPr>
-          <p:cNvPr id="130" name="Google Shape;130;g389dc543835_0_2" descr="Programs | NY I-Corps Hub"/>
-          <p:cNvPicPr preferRelativeResize="0"/>
-          <p:nvPr/>
-        </p:nvPicPr>
-        <p:blipFill rotWithShape="1">
-          <a:blip r:embed="rId5">
-            <a:alphaModFix/>
-          </a:blip>
-          <a:srcRect/>
-          <a:stretch/>
-        </p:blipFill>
-        <p:spPr>
-          <a:xfrm>
-            <a:off x="8527222" y="4587646"/>
-            <a:ext cx="1957443" cy="1423115"/>
-          </a:xfrm>
-          <a:prstGeom prst="rect">
-            <a:avLst/>
-          </a:prstGeom>
-          <a:noFill/>
-          <a:ln>
-            <a:noFill/>
-          </a:ln>
-        </p:spPr>
-      </p:pic>
+        <p:txBody>
+          <a:bodyPr wrap="square" rtlCol="0">
+            <a:spAutoFit/>
+          </a:bodyPr>
+          <a:lstStyle/>
+          <a:p>
+            <a:r>
+              <a:rPr lang="en-US" sz="3200" b="1" dirty="0"/>
+              <a:t>Jason Kuruzovich</a:t>
+            </a:r>
+          </a:p>
+        </p:txBody>
+      </p:sp>
     </p:spTree>
   </p:cSld>
   <p:clrMapOvr>
@@ -11901,6 +12078,453 @@
 </p:sld>
 </file>
 
+<file path=ppt/slides/slide27.xml><?xml version="1.0" encoding="utf-8"?>
+<p:sld xmlns:a="http://schemas.openxmlformats.org/drawingml/2006/main" xmlns:r="http://schemas.openxmlformats.org/officeDocument/2006/relationships" xmlns:p="http://schemas.openxmlformats.org/presentationml/2006/main">
+  <p:cSld>
+    <p:spTree>
+      <p:nvGrpSpPr>
+        <p:cNvPr id="1" name=""/>
+        <p:cNvGrpSpPr/>
+        <p:nvPr/>
+      </p:nvGrpSpPr>
+      <p:grpSpPr>
+        <a:xfrm>
+          <a:off x="0" y="0"/>
+          <a:ext cx="0" cy="0"/>
+          <a:chOff x="0" y="0"/>
+          <a:chExt cx="0" cy="0"/>
+        </a:xfrm>
+      </p:grpSpPr>
+      <p:sp>
+        <p:nvSpPr>
+          <p:cNvPr id="2" name="Title 1">
+            <a:extLst>
+              <a:ext uri="{FF2B5EF4-FFF2-40B4-BE49-F238E27FC236}">
+                <a16:creationId xmlns:a16="http://schemas.microsoft.com/office/drawing/2014/main" id="{84A26670-BA01-3D85-82BE-9E1566301C72}"/>
+              </a:ext>
+            </a:extLst>
+          </p:cNvPr>
+          <p:cNvSpPr>
+            <a:spLocks noGrp="1"/>
+          </p:cNvSpPr>
+          <p:nvPr>
+            <p:ph type="title"/>
+          </p:nvPr>
+        </p:nvSpPr>
+        <p:spPr/>
+        <p:txBody>
+          <a:bodyPr/>
+          <a:lstStyle/>
+          <a:p>
+            <a:r>
+              <a:rPr lang="en-US" dirty="0"/>
+              <a:t>Additions: BCRYPT VS Others</a:t>
+            </a:r>
+          </a:p>
+        </p:txBody>
+      </p:sp>
+      <p:sp>
+        <p:nvSpPr>
+          <p:cNvPr id="4" name="Slide Number Placeholder 3">
+            <a:extLst>
+              <a:ext uri="{FF2B5EF4-FFF2-40B4-BE49-F238E27FC236}">
+                <a16:creationId xmlns:a16="http://schemas.microsoft.com/office/drawing/2014/main" id="{18C2399D-7050-D025-D1FF-6FA119CD21A3}"/>
+              </a:ext>
+            </a:extLst>
+          </p:cNvPr>
+          <p:cNvSpPr>
+            <a:spLocks noGrp="1"/>
+          </p:cNvSpPr>
+          <p:nvPr>
+            <p:ph type="sldNum" idx="12"/>
+          </p:nvPr>
+        </p:nvSpPr>
+        <p:spPr/>
+        <p:txBody>
+          <a:bodyPr/>
+          <a:lstStyle/>
+          <a:p>
+            <a:pPr marL="0" lvl="0" indent="0" algn="ctr" rtl="0">
+              <a:spcBef>
+                <a:spcPts val="0"/>
+              </a:spcBef>
+              <a:spcAft>
+                <a:spcPts val="0"/>
+              </a:spcAft>
+              <a:buNone/>
+            </a:pPr>
+            <a:fld id="{00000000-1234-1234-1234-123412341234}" type="slidenum">
+              <a:rPr lang="en-US" smtClean="0"/>
+              <a:t>27</a:t>
+            </a:fld>
+            <a:endParaRPr lang="en-US"/>
+          </a:p>
+        </p:txBody>
+      </p:sp>
+      <p:pic>
+        <p:nvPicPr>
+          <p:cNvPr id="5" name="Picture 4">
+            <a:extLst>
+              <a:ext uri="{FF2B5EF4-FFF2-40B4-BE49-F238E27FC236}">
+                <a16:creationId xmlns:a16="http://schemas.microsoft.com/office/drawing/2014/main" id="{28AC2B91-BAAB-B1E7-B222-697C95D269C8}"/>
+              </a:ext>
+            </a:extLst>
+          </p:cNvPr>
+          <p:cNvPicPr>
+            <a:picLocks noChangeAspect="1"/>
+          </p:cNvPicPr>
+          <p:nvPr/>
+        </p:nvPicPr>
+        <p:blipFill>
+          <a:blip r:embed="rId2"/>
+          <a:stretch>
+            <a:fillRect/>
+          </a:stretch>
+        </p:blipFill>
+        <p:spPr>
+          <a:xfrm>
+            <a:off x="762000" y="1377944"/>
+            <a:ext cx="9220200" cy="3545398"/>
+          </a:xfrm>
+          <a:prstGeom prst="rect">
+            <a:avLst/>
+          </a:prstGeom>
+        </p:spPr>
+      </p:pic>
+      <p:sp>
+        <p:nvSpPr>
+          <p:cNvPr id="7" name="TextBox 6">
+            <a:extLst>
+              <a:ext uri="{FF2B5EF4-FFF2-40B4-BE49-F238E27FC236}">
+                <a16:creationId xmlns:a16="http://schemas.microsoft.com/office/drawing/2014/main" id="{9ECDD066-D2EE-FF6A-DF62-55A4F8253C52}"/>
+              </a:ext>
+            </a:extLst>
+          </p:cNvPr>
+          <p:cNvSpPr txBox="1"/>
+          <p:nvPr/>
+        </p:nvSpPr>
+        <p:spPr>
+          <a:xfrm>
+            <a:off x="683079" y="5010605"/>
+            <a:ext cx="9788978" cy="954107"/>
+          </a:xfrm>
+          <a:prstGeom prst="rect">
+            <a:avLst/>
+          </a:prstGeom>
+          <a:noFill/>
+        </p:spPr>
+        <p:txBody>
+          <a:bodyPr wrap="square">
+            <a:spAutoFit/>
+          </a:bodyPr>
+          <a:lstStyle/>
+          <a:p>
+            <a:r>
+              <a:rPr lang="en-US" b="0" i="0" u="none" strike="noStrike" dirty="0">
+                <a:solidFill>
+                  <a:srgbClr val="333D42"/>
+                </a:solidFill>
+                <a:effectLst/>
+                <a:latin typeface="-apple-system"/>
+              </a:rPr>
+              <a:t>“Argon2 is the newest algorithm among these and is currently considered to be the strongest password hashing algorithm available. It is designed to be memory-hard, meaning that it requires a lot of memory to compute. This makes it difficult for attackers to use specialized hardware like GPUs and ASICs to crack passwords. Argon2 has several parameters that need to be kept in mind when using it, such as the amount of memory to use and the number of iterations to perform.”</a:t>
+            </a:r>
+            <a:endParaRPr lang="en-US" dirty="0"/>
+          </a:p>
+        </p:txBody>
+      </p:sp>
+      <p:sp>
+        <p:nvSpPr>
+          <p:cNvPr id="9" name="TextBox 8">
+            <a:extLst>
+              <a:ext uri="{FF2B5EF4-FFF2-40B4-BE49-F238E27FC236}">
+                <a16:creationId xmlns:a16="http://schemas.microsoft.com/office/drawing/2014/main" id="{66FC2879-0F1E-73C2-DBC4-F64EF04FA145}"/>
+              </a:ext>
+            </a:extLst>
+          </p:cNvPr>
+          <p:cNvSpPr txBox="1"/>
+          <p:nvPr/>
+        </p:nvSpPr>
+        <p:spPr>
+          <a:xfrm>
+            <a:off x="1074964" y="6051975"/>
+            <a:ext cx="6134100" cy="523220"/>
+          </a:xfrm>
+          <a:prstGeom prst="rect">
+            <a:avLst/>
+          </a:prstGeom>
+          <a:noFill/>
+        </p:spPr>
+        <p:txBody>
+          <a:bodyPr wrap="square">
+            <a:spAutoFit/>
+          </a:bodyPr>
+          <a:lstStyle/>
+          <a:p>
+            <a:r>
+              <a:rPr lang="en-US" dirty="0">
+                <a:hlinkClick r:id="rId3"/>
+              </a:rPr>
+              <a:t>https://www.reddit.com/r/cryptography/comments/11tqci2/argon2_vs_bcrypt_vs_scrypt_vs_pbkdf2/</a:t>
+            </a:r>
+            <a:r>
+              <a:rPr lang="en-US" dirty="0"/>
+              <a:t> </a:t>
+            </a:r>
+          </a:p>
+        </p:txBody>
+      </p:sp>
+    </p:spTree>
+    <p:extLst>
+      <p:ext uri="{BB962C8B-B14F-4D97-AF65-F5344CB8AC3E}">
+        <p14:creationId xmlns:p14="http://schemas.microsoft.com/office/powerpoint/2010/main" val="3445431097"/>
+      </p:ext>
+    </p:extLst>
+  </p:cSld>
+  <p:clrMapOvr>
+    <a:masterClrMapping/>
+  </p:clrMapOvr>
+</p:sld>
+</file>
+
+<file path=ppt/slides/slide28.xml><?xml version="1.0" encoding="utf-8"?>
+<p:sld xmlns:a="http://schemas.openxmlformats.org/drawingml/2006/main" xmlns:r="http://schemas.openxmlformats.org/officeDocument/2006/relationships" xmlns:p="http://schemas.openxmlformats.org/presentationml/2006/main">
+  <p:cSld>
+    <p:spTree>
+      <p:nvGrpSpPr>
+        <p:cNvPr id="1" name=""/>
+        <p:cNvGrpSpPr/>
+        <p:nvPr/>
+      </p:nvGrpSpPr>
+      <p:grpSpPr>
+        <a:xfrm>
+          <a:off x="0" y="0"/>
+          <a:ext cx="0" cy="0"/>
+          <a:chOff x="0" y="0"/>
+          <a:chExt cx="0" cy="0"/>
+        </a:xfrm>
+      </p:grpSpPr>
+      <p:sp>
+        <p:nvSpPr>
+          <p:cNvPr id="2" name="Title 1">
+            <a:extLst>
+              <a:ext uri="{FF2B5EF4-FFF2-40B4-BE49-F238E27FC236}">
+                <a16:creationId xmlns:a16="http://schemas.microsoft.com/office/drawing/2014/main" id="{7AF7352E-7AA7-C435-5F16-E8E64F981FDD}"/>
+              </a:ext>
+            </a:extLst>
+          </p:cNvPr>
+          <p:cNvSpPr>
+            <a:spLocks noGrp="1"/>
+          </p:cNvSpPr>
+          <p:nvPr>
+            <p:ph type="title"/>
+          </p:nvPr>
+        </p:nvSpPr>
+        <p:spPr/>
+        <p:txBody>
+          <a:bodyPr/>
+          <a:lstStyle/>
+          <a:p>
+            <a:endParaRPr lang="en-US"/>
+          </a:p>
+        </p:txBody>
+      </p:sp>
+      <p:sp>
+        <p:nvSpPr>
+          <p:cNvPr id="3" name="Text Placeholder 2">
+            <a:extLst>
+              <a:ext uri="{FF2B5EF4-FFF2-40B4-BE49-F238E27FC236}">
+                <a16:creationId xmlns:a16="http://schemas.microsoft.com/office/drawing/2014/main" id="{1998232F-ADFC-F501-1F97-86FD03FAD0BB}"/>
+              </a:ext>
+            </a:extLst>
+          </p:cNvPr>
+          <p:cNvSpPr>
+            <a:spLocks noGrp="1"/>
+          </p:cNvSpPr>
+          <p:nvPr>
+            <p:ph type="body" idx="1"/>
+          </p:nvPr>
+        </p:nvSpPr>
+        <p:spPr/>
+        <p:txBody>
+          <a:bodyPr/>
+          <a:lstStyle/>
+          <a:p>
+            <a:endParaRPr lang="en-US"/>
+          </a:p>
+        </p:txBody>
+      </p:sp>
+      <p:sp>
+        <p:nvSpPr>
+          <p:cNvPr id="4" name="Slide Number Placeholder 3">
+            <a:extLst>
+              <a:ext uri="{FF2B5EF4-FFF2-40B4-BE49-F238E27FC236}">
+                <a16:creationId xmlns:a16="http://schemas.microsoft.com/office/drawing/2014/main" id="{AE3BA7E3-5F2C-1B14-900E-719782767454}"/>
+              </a:ext>
+            </a:extLst>
+          </p:cNvPr>
+          <p:cNvSpPr>
+            <a:spLocks noGrp="1"/>
+          </p:cNvSpPr>
+          <p:nvPr>
+            <p:ph type="sldNum" idx="12"/>
+          </p:nvPr>
+        </p:nvSpPr>
+        <p:spPr/>
+        <p:txBody>
+          <a:bodyPr/>
+          <a:lstStyle/>
+          <a:p>
+            <a:pPr marL="0" lvl="0" indent="0" algn="ctr" rtl="0">
+              <a:spcBef>
+                <a:spcPts val="0"/>
+              </a:spcBef>
+              <a:spcAft>
+                <a:spcPts val="0"/>
+              </a:spcAft>
+              <a:buNone/>
+            </a:pPr>
+            <a:fld id="{00000000-1234-1234-1234-123412341234}" type="slidenum">
+              <a:rPr lang="en-US" smtClean="0"/>
+              <a:t>28</a:t>
+            </a:fld>
+            <a:endParaRPr lang="en-US"/>
+          </a:p>
+        </p:txBody>
+      </p:sp>
+      <p:pic>
+        <p:nvPicPr>
+          <p:cNvPr id="5" name="Picture 4">
+            <a:extLst>
+              <a:ext uri="{FF2B5EF4-FFF2-40B4-BE49-F238E27FC236}">
+                <a16:creationId xmlns:a16="http://schemas.microsoft.com/office/drawing/2014/main" id="{F06917C5-8748-74D7-135B-B5CEBE781EFA}"/>
+              </a:ext>
+            </a:extLst>
+          </p:cNvPr>
+          <p:cNvPicPr>
+            <a:picLocks noChangeAspect="1"/>
+          </p:cNvPicPr>
+          <p:nvPr/>
+        </p:nvPicPr>
+        <p:blipFill>
+          <a:blip r:embed="rId2"/>
+          <a:stretch>
+            <a:fillRect/>
+          </a:stretch>
+        </p:blipFill>
+        <p:spPr>
+          <a:xfrm>
+            <a:off x="1114215" y="1968997"/>
+            <a:ext cx="9205442" cy="2920005"/>
+          </a:xfrm>
+          <a:prstGeom prst="rect">
+            <a:avLst/>
+          </a:prstGeom>
+        </p:spPr>
+      </p:pic>
+    </p:spTree>
+    <p:extLst>
+      <p:ext uri="{BB962C8B-B14F-4D97-AF65-F5344CB8AC3E}">
+        <p14:creationId xmlns:p14="http://schemas.microsoft.com/office/powerpoint/2010/main" val="4119626008"/>
+      </p:ext>
+    </p:extLst>
+  </p:cSld>
+  <p:clrMapOvr>
+    <a:masterClrMapping/>
+  </p:clrMapOvr>
+</p:sld>
+</file>
+
+<file path=ppt/slides/slide29.xml><?xml version="1.0" encoding="utf-8"?>
+<p:sld xmlns:a="http://schemas.openxmlformats.org/drawingml/2006/main" xmlns:r="http://schemas.openxmlformats.org/officeDocument/2006/relationships" xmlns:p="http://schemas.openxmlformats.org/presentationml/2006/main">
+  <p:cSld>
+    <p:spTree>
+      <p:nvGrpSpPr>
+        <p:cNvPr id="1" name=""/>
+        <p:cNvGrpSpPr/>
+        <p:nvPr/>
+      </p:nvGrpSpPr>
+      <p:grpSpPr>
+        <a:xfrm>
+          <a:off x="0" y="0"/>
+          <a:ext cx="0" cy="0"/>
+          <a:chOff x="0" y="0"/>
+          <a:chExt cx="0" cy="0"/>
+        </a:xfrm>
+      </p:grpSpPr>
+      <p:sp>
+        <p:nvSpPr>
+          <p:cNvPr id="2" name="Title 1"/>
+          <p:cNvSpPr>
+            <a:spLocks noGrp="1"/>
+          </p:cNvSpPr>
+          <p:nvPr>
+            <p:ph type="title"/>
+          </p:nvPr>
+        </p:nvSpPr>
+        <p:spPr/>
+        <p:txBody>
+          <a:bodyPr/>
+          <a:lstStyle/>
+          <a:p>
+            <a:r>
+              <a:t>Access + Refresh Token Implementation</a:t>
+            </a:r>
+          </a:p>
+          <a:p>
+            <a:r>
+              <a:t>(Explicit Server + Client Code)</a:t>
+            </a:r>
+          </a:p>
+        </p:txBody>
+      </p:sp>
+      <p:sp>
+        <p:nvSpPr>
+          <p:cNvPr id="3" name="Content Placeholder 2"/>
+          <p:cNvSpPr>
+            <a:spLocks noGrp="1"/>
+          </p:cNvSpPr>
+          <p:nvPr>
+            <p:ph idx="1"/>
+          </p:nvPr>
+        </p:nvSpPr>
+        <p:spPr/>
+        <p:txBody>
+          <a:bodyPr/>
+          <a:lstStyle/>
+          <a:p>
+            <a:r>
+              <a:t>Built on Lab 6 JWT Authentication</a:t>
+            </a:r>
+          </a:p>
+          <a:p>
+            <a:endParaRPr/>
+          </a:p>
+          <a:p>
+            <a:r>
+              <a:t>Goal:</a:t>
+            </a:r>
+          </a:p>
+          <a:p>
+            <a:r>
+              <a:t>Access Token → React memory</a:t>
+            </a:r>
+          </a:p>
+          <a:p>
+            <a:r>
+              <a:t>Refresh Token → HTTP-only cookie (server controlled)</a:t>
+            </a:r>
+          </a:p>
+        </p:txBody>
+      </p:sp>
+    </p:spTree>
+  </p:cSld>
+  <p:clrMapOvr>
+    <a:masterClrMapping/>
+  </p:clrMapOvr>
+</p:sld>
+</file>
+
 <file path=ppt/slides/slide3.xml><?xml version="1.0" encoding="utf-8"?>
 <p:sld xmlns:a="http://schemas.openxmlformats.org/drawingml/2006/main" xmlns:r="http://schemas.openxmlformats.org/officeDocument/2006/relationships" xmlns:p="http://schemas.openxmlformats.org/presentationml/2006/main">
   <p:cSld>
@@ -12031,10 +12655,6 @@
               <a:rPr lang="en-US" dirty="0"/>
               <a:t> &amp; Tooling)</a:t>
             </a:r>
-            <a:br>
-              <a:rPr lang="en-US" dirty="0"/>
-            </a:br>
-            <a:endParaRPr lang="en-US" dirty="0"/>
           </a:p>
           <a:p>
             <a:pPr marL="139700" indent="0">
@@ -12127,6 +12747,1486 @@
         <p14:creationId xmlns:p14="http://schemas.microsoft.com/office/powerpoint/2010/main" val="1986440798"/>
       </p:ext>
     </p:extLst>
+  </p:cSld>
+  <p:clrMapOvr>
+    <a:masterClrMapping/>
+  </p:clrMapOvr>
+</p:sld>
+</file>
+
+<file path=ppt/slides/slide30.xml><?xml version="1.0" encoding="utf-8"?>
+<p:sld xmlns:a="http://schemas.openxmlformats.org/drawingml/2006/main" xmlns:r="http://schemas.openxmlformats.org/officeDocument/2006/relationships" xmlns:p="http://schemas.openxmlformats.org/presentationml/2006/main">
+  <p:cSld>
+    <p:spTree>
+      <p:nvGrpSpPr>
+        <p:cNvPr id="1" name=""/>
+        <p:cNvGrpSpPr/>
+        <p:nvPr/>
+      </p:nvGrpSpPr>
+      <p:grpSpPr>
+        <a:xfrm>
+          <a:off x="0" y="0"/>
+          <a:ext cx="0" cy="0"/>
+          <a:chOff x="0" y="0"/>
+          <a:chExt cx="0" cy="0"/>
+        </a:xfrm>
+      </p:grpSpPr>
+      <p:sp>
+        <p:nvSpPr>
+          <p:cNvPr id="2" name="Title 1"/>
+          <p:cNvSpPr>
+            <a:spLocks noGrp="1"/>
+          </p:cNvSpPr>
+          <p:nvPr>
+            <p:ph type="title"/>
+          </p:nvPr>
+        </p:nvSpPr>
+        <p:spPr/>
+        <p:txBody>
+          <a:bodyPr/>
+          <a:lstStyle/>
+          <a:p>
+            <a:r>
+              <a:t>Full Architecture Overview</a:t>
+            </a:r>
+          </a:p>
+        </p:txBody>
+      </p:sp>
+      <p:sp>
+        <p:nvSpPr>
+          <p:cNvPr id="3" name="Content Placeholder 2"/>
+          <p:cNvSpPr>
+            <a:spLocks noGrp="1"/>
+          </p:cNvSpPr>
+          <p:nvPr>
+            <p:ph idx="1"/>
+          </p:nvPr>
+        </p:nvSpPr>
+        <p:spPr/>
+        <p:txBody>
+          <a:bodyPr>
+            <a:normAutofit/>
+          </a:bodyPr>
+          <a:lstStyle/>
+          <a:p>
+            <a:r>
+              <a:rPr dirty="0"/>
+              <a:t>SERVER:</a:t>
+            </a:r>
+          </a:p>
+          <a:p>
+            <a:r>
+              <a:rPr dirty="0"/>
+              <a:t>  • Issues access token (short-lived)</a:t>
+            </a:r>
+          </a:p>
+          <a:p>
+            <a:r>
+              <a:rPr dirty="0"/>
+              <a:t>  • Issues refresh token (long-lived)</a:t>
+            </a:r>
+          </a:p>
+          <a:p>
+            <a:r>
+              <a:rPr dirty="0"/>
+              <a:t>  • Stores refresh token in HTTP-only cookie</a:t>
+            </a:r>
+          </a:p>
+          <a:p>
+            <a:endParaRPr dirty="0"/>
+          </a:p>
+          <a:p>
+            <a:r>
+              <a:rPr dirty="0"/>
+              <a:t>CLIENT:</a:t>
+            </a:r>
+          </a:p>
+          <a:p>
+            <a:r>
+              <a:rPr dirty="0"/>
+              <a:t>  • Stores access token in React state</a:t>
+            </a:r>
+          </a:p>
+          <a:p>
+            <a:r>
+              <a:rPr dirty="0"/>
+              <a:t>  • NEVER stores refresh token in JS</a:t>
+            </a:r>
+          </a:p>
+        </p:txBody>
+      </p:sp>
+    </p:spTree>
+  </p:cSld>
+  <p:clrMapOvr>
+    <a:masterClrMapping/>
+  </p:clrMapOvr>
+</p:sld>
+</file>
+
+<file path=ppt/slides/slide31.xml><?xml version="1.0" encoding="utf-8"?>
+<p:sld xmlns:a="http://schemas.openxmlformats.org/drawingml/2006/main" xmlns:r="http://schemas.openxmlformats.org/officeDocument/2006/relationships" xmlns:p="http://schemas.openxmlformats.org/presentationml/2006/main">
+  <p:cSld>
+    <p:spTree>
+      <p:nvGrpSpPr>
+        <p:cNvPr id="1" name=""/>
+        <p:cNvGrpSpPr/>
+        <p:nvPr/>
+      </p:nvGrpSpPr>
+      <p:grpSpPr>
+        <a:xfrm>
+          <a:off x="0" y="0"/>
+          <a:ext cx="0" cy="0"/>
+          <a:chOff x="0" y="0"/>
+          <a:chExt cx="0" cy="0"/>
+        </a:xfrm>
+      </p:grpSpPr>
+      <p:sp>
+        <p:nvSpPr>
+          <p:cNvPr id="2" name="Title 1"/>
+          <p:cNvSpPr>
+            <a:spLocks noGrp="1"/>
+          </p:cNvSpPr>
+          <p:nvPr>
+            <p:ph type="title"/>
+          </p:nvPr>
+        </p:nvSpPr>
+        <p:spPr/>
+        <p:txBody>
+          <a:bodyPr/>
+          <a:lstStyle/>
+          <a:p>
+            <a:r>
+              <a:t>SERVER: /api/login (Issues Both Tokens)</a:t>
+            </a:r>
+          </a:p>
+        </p:txBody>
+      </p:sp>
+      <p:sp>
+        <p:nvSpPr>
+          <p:cNvPr id="3" name="Content Placeholder 2"/>
+          <p:cNvSpPr>
+            <a:spLocks noGrp="1"/>
+          </p:cNvSpPr>
+          <p:nvPr>
+            <p:ph idx="1"/>
+          </p:nvPr>
+        </p:nvSpPr>
+        <p:spPr/>
+        <p:txBody>
+          <a:bodyPr>
+            <a:normAutofit fontScale="47500" lnSpcReduction="20000"/>
+          </a:bodyPr>
+          <a:lstStyle/>
+          <a:p>
+            <a:r>
+              <a:rPr dirty="0"/>
+              <a:t>const </a:t>
+            </a:r>
+            <a:r>
+              <a:rPr dirty="0" err="1"/>
+              <a:t>accessToken</a:t>
+            </a:r>
+            <a:r>
+              <a:rPr dirty="0"/>
+              <a:t> = </a:t>
+            </a:r>
+            <a:r>
+              <a:rPr dirty="0" err="1"/>
+              <a:t>jwt.sign</a:t>
+            </a:r>
+            <a:r>
+              <a:rPr dirty="0"/>
+              <a:t>(payload, JWT_SECRET, { </a:t>
+            </a:r>
+            <a:r>
+              <a:rPr dirty="0" err="1"/>
+              <a:t>expiresIn</a:t>
+            </a:r>
+            <a:r>
+              <a:rPr dirty="0"/>
+              <a:t>: '15m' });</a:t>
+            </a:r>
+          </a:p>
+          <a:p>
+            <a:r>
+              <a:rPr dirty="0"/>
+              <a:t>const </a:t>
+            </a:r>
+            <a:r>
+              <a:rPr dirty="0" err="1"/>
+              <a:t>refreshToken</a:t>
+            </a:r>
+            <a:r>
+              <a:rPr dirty="0"/>
+              <a:t> = </a:t>
+            </a:r>
+            <a:r>
+              <a:rPr dirty="0" err="1"/>
+              <a:t>jwt.sign</a:t>
+            </a:r>
+            <a:r>
+              <a:rPr dirty="0"/>
+              <a:t>(payload, REFRESH_SECRET, { </a:t>
+            </a:r>
+            <a:r>
+              <a:rPr dirty="0" err="1"/>
+              <a:t>expiresIn</a:t>
+            </a:r>
+            <a:r>
+              <a:rPr dirty="0"/>
+              <a:t>: '7d' });</a:t>
+            </a:r>
+          </a:p>
+          <a:p>
+            <a:endParaRPr dirty="0"/>
+          </a:p>
+          <a:p>
+            <a:r>
+              <a:rPr dirty="0"/>
+              <a:t>// Store refresh token server-side (optional DB/in-memory)</a:t>
+            </a:r>
+          </a:p>
+          <a:p>
+            <a:r>
+              <a:rPr dirty="0" err="1"/>
+              <a:t>refreshTokens.push</a:t>
+            </a:r>
+            <a:r>
+              <a:rPr dirty="0"/>
+              <a:t>(</a:t>
+            </a:r>
+            <a:r>
+              <a:rPr dirty="0" err="1"/>
+              <a:t>refreshToken</a:t>
+            </a:r>
+            <a:r>
+              <a:rPr dirty="0"/>
+              <a:t>);</a:t>
+            </a:r>
+          </a:p>
+          <a:p>
+            <a:endParaRPr dirty="0"/>
+          </a:p>
+          <a:p>
+            <a:r>
+              <a:rPr dirty="0"/>
+              <a:t>// THIS stores refresh token in browser cookie</a:t>
+            </a:r>
+          </a:p>
+          <a:p>
+            <a:r>
+              <a:rPr dirty="0" err="1"/>
+              <a:t>res.cookie</a:t>
+            </a:r>
+            <a:r>
+              <a:rPr dirty="0"/>
+              <a:t>('</a:t>
+            </a:r>
+            <a:r>
+              <a:rPr dirty="0" err="1"/>
+              <a:t>refreshToken</a:t>
+            </a:r>
+            <a:r>
+              <a:rPr dirty="0"/>
+              <a:t>', </a:t>
+            </a:r>
+            <a:r>
+              <a:rPr dirty="0" err="1"/>
+              <a:t>refreshToken</a:t>
+            </a:r>
+            <a:r>
+              <a:rPr dirty="0"/>
+              <a:t>, {</a:t>
+            </a:r>
+          </a:p>
+          <a:p>
+            <a:r>
+              <a:rPr dirty="0"/>
+              <a:t>  </a:t>
+            </a:r>
+            <a:r>
+              <a:rPr dirty="0" err="1"/>
+              <a:t>httpOnly</a:t>
+            </a:r>
+            <a:r>
+              <a:rPr dirty="0"/>
+              <a:t>: true,</a:t>
+            </a:r>
+          </a:p>
+          <a:p>
+            <a:r>
+              <a:rPr dirty="0"/>
+              <a:t>  secure: true,</a:t>
+            </a:r>
+          </a:p>
+          <a:p>
+            <a:r>
+              <a:rPr dirty="0"/>
+              <a:t>  </a:t>
+            </a:r>
+            <a:r>
+              <a:rPr dirty="0" err="1"/>
+              <a:t>sameSite</a:t>
+            </a:r>
+            <a:r>
+              <a:rPr dirty="0"/>
+              <a:t>: 'strict',</a:t>
+            </a:r>
+          </a:p>
+          <a:p>
+            <a:r>
+              <a:rPr dirty="0"/>
+              <a:t>  </a:t>
+            </a:r>
+            <a:r>
+              <a:rPr dirty="0" err="1"/>
+              <a:t>maxAge</a:t>
+            </a:r>
+            <a:r>
+              <a:rPr dirty="0"/>
+              <a:t>: 7 * 24 * 60 * 60 * 1000</a:t>
+            </a:r>
+          </a:p>
+          <a:p>
+            <a:r>
+              <a:rPr dirty="0"/>
+              <a:t>});</a:t>
+            </a:r>
+          </a:p>
+          <a:p>
+            <a:endParaRPr dirty="0"/>
+          </a:p>
+          <a:p>
+            <a:r>
+              <a:rPr dirty="0" err="1"/>
+              <a:t>res.json</a:t>
+            </a:r>
+            <a:r>
+              <a:rPr dirty="0"/>
+              <a:t>({ token: </a:t>
+            </a:r>
+            <a:r>
+              <a:rPr dirty="0" err="1"/>
+              <a:t>accessToken</a:t>
+            </a:r>
+            <a:r>
+              <a:rPr dirty="0"/>
+              <a:t> });</a:t>
+            </a:r>
+          </a:p>
+        </p:txBody>
+      </p:sp>
+    </p:spTree>
+  </p:cSld>
+  <p:clrMapOvr>
+    <a:masterClrMapping/>
+  </p:clrMapOvr>
+</p:sld>
+</file>
+
+<file path=ppt/slides/slide32.xml><?xml version="1.0" encoding="utf-8"?>
+<p:sld xmlns:a="http://schemas.openxmlformats.org/drawingml/2006/main" xmlns:r="http://schemas.openxmlformats.org/officeDocument/2006/relationships" xmlns:p="http://schemas.openxmlformats.org/presentationml/2006/main">
+  <p:cSld>
+    <p:spTree>
+      <p:nvGrpSpPr>
+        <p:cNvPr id="1" name=""/>
+        <p:cNvGrpSpPr/>
+        <p:nvPr/>
+      </p:nvGrpSpPr>
+      <p:grpSpPr>
+        <a:xfrm>
+          <a:off x="0" y="0"/>
+          <a:ext cx="0" cy="0"/>
+          <a:chOff x="0" y="0"/>
+          <a:chExt cx="0" cy="0"/>
+        </a:xfrm>
+      </p:grpSpPr>
+      <p:sp>
+        <p:nvSpPr>
+          <p:cNvPr id="2" name="Title 1"/>
+          <p:cNvSpPr>
+            <a:spLocks noGrp="1"/>
+          </p:cNvSpPr>
+          <p:nvPr>
+            <p:ph type="title"/>
+          </p:nvPr>
+        </p:nvSpPr>
+        <p:spPr/>
+        <p:txBody>
+          <a:bodyPr/>
+          <a:lstStyle/>
+          <a:p>
+            <a:r>
+              <a:t>What Actually Stores the Refresh Token?</a:t>
+            </a:r>
+          </a:p>
+        </p:txBody>
+      </p:sp>
+      <p:sp>
+        <p:nvSpPr>
+          <p:cNvPr id="3" name="Content Placeholder 2"/>
+          <p:cNvSpPr>
+            <a:spLocks noGrp="1"/>
+          </p:cNvSpPr>
+          <p:nvPr>
+            <p:ph idx="1"/>
+          </p:nvPr>
+        </p:nvSpPr>
+        <p:spPr/>
+        <p:txBody>
+          <a:bodyPr>
+            <a:normAutofit/>
+          </a:bodyPr>
+          <a:lstStyle/>
+          <a:p>
+            <a:r>
+              <a:rPr dirty="0"/>
+              <a:t>THIS LINE on the SERVER:</a:t>
+            </a:r>
+          </a:p>
+          <a:p>
+            <a:r>
+              <a:rPr dirty="0" err="1"/>
+              <a:t>res.cookie</a:t>
+            </a:r>
+            <a:r>
+              <a:rPr dirty="0"/>
+              <a:t>('</a:t>
+            </a:r>
+            <a:r>
+              <a:rPr dirty="0" err="1"/>
+              <a:t>refreshToken</a:t>
+            </a:r>
+            <a:r>
+              <a:rPr dirty="0"/>
+              <a:t>', </a:t>
+            </a:r>
+            <a:r>
+              <a:rPr dirty="0" err="1"/>
+              <a:t>refreshToken</a:t>
+            </a:r>
+            <a:r>
+              <a:rPr dirty="0"/>
+              <a:t>, { </a:t>
+            </a:r>
+            <a:r>
+              <a:rPr dirty="0" err="1"/>
+              <a:t>httpOnly</a:t>
+            </a:r>
+            <a:r>
+              <a:rPr dirty="0"/>
+              <a:t>: true })</a:t>
+            </a:r>
+          </a:p>
+          <a:p>
+            <a:endParaRPr dirty="0"/>
+          </a:p>
+          <a:p>
+            <a:r>
+              <a:rPr dirty="0"/>
+              <a:t>Browser receives Set-Cookie header →</a:t>
+            </a:r>
+          </a:p>
+          <a:p>
+            <a:r>
+              <a:rPr dirty="0"/>
+              <a:t>Browser stores cookie automatically</a:t>
+            </a:r>
+          </a:p>
+          <a:p>
+            <a:endParaRPr dirty="0"/>
+          </a:p>
+          <a:p>
+            <a:r>
+              <a:rPr dirty="0"/>
+              <a:t>React NEVER sees the refresh token.</a:t>
+            </a:r>
+          </a:p>
+        </p:txBody>
+      </p:sp>
+    </p:spTree>
+  </p:cSld>
+  <p:clrMapOvr>
+    <a:masterClrMapping/>
+  </p:clrMapOvr>
+</p:sld>
+</file>
+
+<file path=ppt/slides/slide33.xml><?xml version="1.0" encoding="utf-8"?>
+<p:sld xmlns:a="http://schemas.openxmlformats.org/drawingml/2006/main" xmlns:r="http://schemas.openxmlformats.org/officeDocument/2006/relationships" xmlns:p="http://schemas.openxmlformats.org/presentationml/2006/main">
+  <p:cSld>
+    <p:spTree>
+      <p:nvGrpSpPr>
+        <p:cNvPr id="1" name=""/>
+        <p:cNvGrpSpPr/>
+        <p:nvPr/>
+      </p:nvGrpSpPr>
+      <p:grpSpPr>
+        <a:xfrm>
+          <a:off x="0" y="0"/>
+          <a:ext cx="0" cy="0"/>
+          <a:chOff x="0" y="0"/>
+          <a:chExt cx="0" cy="0"/>
+        </a:xfrm>
+      </p:grpSpPr>
+      <p:sp>
+        <p:nvSpPr>
+          <p:cNvPr id="2" name="Title 1"/>
+          <p:cNvSpPr>
+            <a:spLocks noGrp="1"/>
+          </p:cNvSpPr>
+          <p:nvPr>
+            <p:ph type="title"/>
+          </p:nvPr>
+        </p:nvSpPr>
+        <p:spPr/>
+        <p:txBody>
+          <a:bodyPr/>
+          <a:lstStyle/>
+          <a:p>
+            <a:r>
+              <a:t>CLIENT: Login Code</a:t>
+            </a:r>
+          </a:p>
+        </p:txBody>
+      </p:sp>
+      <p:sp>
+        <p:nvSpPr>
+          <p:cNvPr id="3" name="Content Placeholder 2"/>
+          <p:cNvSpPr>
+            <a:spLocks noGrp="1"/>
+          </p:cNvSpPr>
+          <p:nvPr>
+            <p:ph idx="1"/>
+          </p:nvPr>
+        </p:nvSpPr>
+        <p:spPr/>
+        <p:txBody>
+          <a:bodyPr>
+            <a:normAutofit fontScale="92500" lnSpcReduction="10000"/>
+          </a:bodyPr>
+          <a:lstStyle/>
+          <a:p>
+            <a:r>
+              <a:rPr dirty="0"/>
+              <a:t>const res = await fetch('/</a:t>
+            </a:r>
+            <a:r>
+              <a:rPr dirty="0" err="1"/>
+              <a:t>api</a:t>
+            </a:r>
+            <a:r>
+              <a:rPr dirty="0"/>
+              <a:t>/login', {</a:t>
+            </a:r>
+          </a:p>
+          <a:p>
+            <a:r>
+              <a:rPr dirty="0"/>
+              <a:t>  method: 'POST',</a:t>
+            </a:r>
+          </a:p>
+          <a:p>
+            <a:r>
+              <a:rPr dirty="0"/>
+              <a:t>  headers: { 'Content-Type': 'application/</a:t>
+            </a:r>
+            <a:r>
+              <a:rPr dirty="0" err="1"/>
+              <a:t>json</a:t>
+            </a:r>
+            <a:r>
+              <a:rPr dirty="0"/>
+              <a:t>' },</a:t>
+            </a:r>
+          </a:p>
+          <a:p>
+            <a:r>
+              <a:rPr dirty="0"/>
+              <a:t>  credentials: 'include',   // allows cookie to be set</a:t>
+            </a:r>
+          </a:p>
+          <a:p>
+            <a:r>
+              <a:rPr dirty="0"/>
+              <a:t>  body: </a:t>
+            </a:r>
+            <a:r>
+              <a:rPr dirty="0" err="1"/>
+              <a:t>JSON.stringify</a:t>
+            </a:r>
+            <a:r>
+              <a:rPr dirty="0"/>
+              <a:t>({ username, password })</a:t>
+            </a:r>
+          </a:p>
+          <a:p>
+            <a:r>
+              <a:rPr dirty="0"/>
+              <a:t>});</a:t>
+            </a:r>
+          </a:p>
+          <a:p>
+            <a:endParaRPr dirty="0"/>
+          </a:p>
+          <a:p>
+            <a:r>
+              <a:rPr dirty="0"/>
+              <a:t>const data = await </a:t>
+            </a:r>
+            <a:r>
+              <a:rPr dirty="0" err="1"/>
+              <a:t>res.json</a:t>
+            </a:r>
+            <a:r>
+              <a:rPr dirty="0"/>
+              <a:t>();</a:t>
+            </a:r>
+          </a:p>
+          <a:p>
+            <a:r>
+              <a:rPr dirty="0" err="1"/>
+              <a:t>setToken</a:t>
+            </a:r>
+            <a:r>
+              <a:rPr dirty="0"/>
+              <a:t>(</a:t>
+            </a:r>
+            <a:r>
+              <a:rPr dirty="0" err="1"/>
+              <a:t>data.token</a:t>
+            </a:r>
+            <a:r>
+              <a:rPr dirty="0"/>
+              <a:t>);   // Access token in memory</a:t>
+            </a:r>
+          </a:p>
+        </p:txBody>
+      </p:sp>
+    </p:spTree>
+  </p:cSld>
+  <p:clrMapOvr>
+    <a:masterClrMapping/>
+  </p:clrMapOvr>
+</p:sld>
+</file>
+
+<file path=ppt/slides/slide34.xml><?xml version="1.0" encoding="utf-8"?>
+<p:sld xmlns:a="http://schemas.openxmlformats.org/drawingml/2006/main" xmlns:r="http://schemas.openxmlformats.org/officeDocument/2006/relationships" xmlns:p="http://schemas.openxmlformats.org/presentationml/2006/main">
+  <p:cSld>
+    <p:spTree>
+      <p:nvGrpSpPr>
+        <p:cNvPr id="1" name=""/>
+        <p:cNvGrpSpPr/>
+        <p:nvPr/>
+      </p:nvGrpSpPr>
+      <p:grpSpPr>
+        <a:xfrm>
+          <a:off x="0" y="0"/>
+          <a:ext cx="0" cy="0"/>
+          <a:chOff x="0" y="0"/>
+          <a:chExt cx="0" cy="0"/>
+        </a:xfrm>
+      </p:grpSpPr>
+      <p:sp>
+        <p:nvSpPr>
+          <p:cNvPr id="2" name="Title 1"/>
+          <p:cNvSpPr>
+            <a:spLocks noGrp="1"/>
+          </p:cNvSpPr>
+          <p:nvPr>
+            <p:ph type="title"/>
+          </p:nvPr>
+        </p:nvSpPr>
+        <p:spPr/>
+        <p:txBody>
+          <a:bodyPr/>
+          <a:lstStyle/>
+          <a:p>
+            <a:r>
+              <a:t>SERVER: /api/refresh</a:t>
+            </a:r>
+          </a:p>
+        </p:txBody>
+      </p:sp>
+      <p:sp>
+        <p:nvSpPr>
+          <p:cNvPr id="3" name="Content Placeholder 2"/>
+          <p:cNvSpPr>
+            <a:spLocks noGrp="1"/>
+          </p:cNvSpPr>
+          <p:nvPr>
+            <p:ph idx="1"/>
+          </p:nvPr>
+        </p:nvSpPr>
+        <p:spPr/>
+        <p:txBody>
+          <a:bodyPr>
+            <a:normAutofit fontScale="47500" lnSpcReduction="20000"/>
+          </a:bodyPr>
+          <a:lstStyle/>
+          <a:p>
+            <a:r>
+              <a:rPr dirty="0" err="1"/>
+              <a:t>app.post</a:t>
+            </a:r>
+            <a:r>
+              <a:rPr dirty="0"/>
+              <a:t>('/</a:t>
+            </a:r>
+            <a:r>
+              <a:rPr dirty="0" err="1"/>
+              <a:t>api</a:t>
+            </a:r>
+            <a:r>
+              <a:rPr dirty="0"/>
+              <a:t>/refresh', (req, res) =&gt; {</a:t>
+            </a:r>
+          </a:p>
+          <a:p>
+            <a:r>
+              <a:rPr dirty="0"/>
+              <a:t>  const token = </a:t>
+            </a:r>
+            <a:r>
+              <a:rPr dirty="0" err="1"/>
+              <a:t>req.cookies.refreshToken</a:t>
+            </a:r>
+            <a:r>
+              <a:rPr dirty="0"/>
+              <a:t>;</a:t>
+            </a:r>
+          </a:p>
+          <a:p>
+            <a:r>
+              <a:rPr dirty="0"/>
+              <a:t>  if (!token) return </a:t>
+            </a:r>
+            <a:r>
+              <a:rPr dirty="0" err="1"/>
+              <a:t>res.sendStatus</a:t>
+            </a:r>
+            <a:r>
+              <a:rPr dirty="0"/>
+              <a:t>(401);</a:t>
+            </a:r>
+          </a:p>
+          <a:p>
+            <a:endParaRPr dirty="0"/>
+          </a:p>
+          <a:p>
+            <a:r>
+              <a:rPr dirty="0"/>
+              <a:t>  </a:t>
+            </a:r>
+            <a:r>
+              <a:rPr dirty="0" err="1"/>
+              <a:t>jwt.verify</a:t>
+            </a:r>
+            <a:r>
+              <a:rPr dirty="0"/>
+              <a:t>(token, REFRESH_SECRET, (err, user) =&gt; {</a:t>
+            </a:r>
+          </a:p>
+          <a:p>
+            <a:r>
+              <a:rPr dirty="0"/>
+              <a:t>    if (err) return </a:t>
+            </a:r>
+            <a:r>
+              <a:rPr dirty="0" err="1"/>
+              <a:t>res.sendStatus</a:t>
+            </a:r>
+            <a:r>
+              <a:rPr dirty="0"/>
+              <a:t>(403);</a:t>
+            </a:r>
+          </a:p>
+          <a:p>
+            <a:endParaRPr dirty="0"/>
+          </a:p>
+          <a:p>
+            <a:r>
+              <a:rPr dirty="0"/>
+              <a:t>    const </a:t>
+            </a:r>
+            <a:r>
+              <a:rPr dirty="0" err="1"/>
+              <a:t>newAccessToken</a:t>
+            </a:r>
+            <a:r>
+              <a:rPr dirty="0"/>
+              <a:t> = </a:t>
+            </a:r>
+            <a:r>
+              <a:rPr dirty="0" err="1"/>
+              <a:t>jwt.sign</a:t>
+            </a:r>
+            <a:r>
+              <a:rPr dirty="0"/>
+              <a:t>(</a:t>
+            </a:r>
+          </a:p>
+          <a:p>
+            <a:r>
+              <a:rPr dirty="0"/>
+              <a:t>      { username: </a:t>
+            </a:r>
+            <a:r>
+              <a:rPr dirty="0" err="1"/>
+              <a:t>user.username</a:t>
+            </a:r>
+            <a:r>
+              <a:rPr dirty="0"/>
+              <a:t> },</a:t>
+            </a:r>
+          </a:p>
+          <a:p>
+            <a:r>
+              <a:rPr dirty="0"/>
+              <a:t>      JWT_SECRET,</a:t>
+            </a:r>
+          </a:p>
+          <a:p>
+            <a:r>
+              <a:rPr dirty="0"/>
+              <a:t>      { </a:t>
+            </a:r>
+            <a:r>
+              <a:rPr dirty="0" err="1"/>
+              <a:t>expiresIn</a:t>
+            </a:r>
+            <a:r>
+              <a:rPr dirty="0"/>
+              <a:t>: '15m' }</a:t>
+            </a:r>
+          </a:p>
+          <a:p>
+            <a:r>
+              <a:rPr dirty="0"/>
+              <a:t>    );</a:t>
+            </a:r>
+          </a:p>
+          <a:p>
+            <a:endParaRPr dirty="0"/>
+          </a:p>
+          <a:p>
+            <a:r>
+              <a:rPr dirty="0"/>
+              <a:t>    </a:t>
+            </a:r>
+            <a:r>
+              <a:rPr dirty="0" err="1"/>
+              <a:t>res.json</a:t>
+            </a:r>
+            <a:r>
+              <a:rPr dirty="0"/>
+              <a:t>({ token: </a:t>
+            </a:r>
+            <a:r>
+              <a:rPr dirty="0" err="1"/>
+              <a:t>newAccessToken</a:t>
+            </a:r>
+            <a:r>
+              <a:rPr dirty="0"/>
+              <a:t> });</a:t>
+            </a:r>
+          </a:p>
+          <a:p>
+            <a:r>
+              <a:rPr dirty="0"/>
+              <a:t>  });</a:t>
+            </a:r>
+          </a:p>
+          <a:p>
+            <a:r>
+              <a:rPr dirty="0"/>
+              <a:t>});</a:t>
+            </a:r>
+          </a:p>
+        </p:txBody>
+      </p:sp>
+    </p:spTree>
+  </p:cSld>
+  <p:clrMapOvr>
+    <a:masterClrMapping/>
+  </p:clrMapOvr>
+</p:sld>
+</file>
+
+<file path=ppt/slides/slide35.xml><?xml version="1.0" encoding="utf-8"?>
+<p:sld xmlns:a="http://schemas.openxmlformats.org/drawingml/2006/main" xmlns:r="http://schemas.openxmlformats.org/officeDocument/2006/relationships" xmlns:p="http://schemas.openxmlformats.org/presentationml/2006/main">
+  <p:cSld>
+    <p:spTree>
+      <p:nvGrpSpPr>
+        <p:cNvPr id="1" name=""/>
+        <p:cNvGrpSpPr/>
+        <p:nvPr/>
+      </p:nvGrpSpPr>
+      <p:grpSpPr>
+        <a:xfrm>
+          <a:off x="0" y="0"/>
+          <a:ext cx="0" cy="0"/>
+          <a:chOff x="0" y="0"/>
+          <a:chExt cx="0" cy="0"/>
+        </a:xfrm>
+      </p:grpSpPr>
+      <p:sp>
+        <p:nvSpPr>
+          <p:cNvPr id="2" name="Title 1"/>
+          <p:cNvSpPr>
+            <a:spLocks noGrp="1"/>
+          </p:cNvSpPr>
+          <p:nvPr>
+            <p:ph type="title"/>
+          </p:nvPr>
+        </p:nvSpPr>
+        <p:spPr/>
+        <p:txBody>
+          <a:bodyPr/>
+          <a:lstStyle/>
+          <a:p>
+            <a:r>
+              <a:t>CLIENT: Silent Refresh on Page Load</a:t>
+            </a:r>
+          </a:p>
+        </p:txBody>
+      </p:sp>
+      <p:sp>
+        <p:nvSpPr>
+          <p:cNvPr id="3" name="Content Placeholder 2"/>
+          <p:cNvSpPr>
+            <a:spLocks noGrp="1"/>
+          </p:cNvSpPr>
+          <p:nvPr>
+            <p:ph idx="1"/>
+          </p:nvPr>
+        </p:nvSpPr>
+        <p:spPr/>
+        <p:txBody>
+          <a:bodyPr>
+            <a:normAutofit fontScale="92500" lnSpcReduction="20000"/>
+          </a:bodyPr>
+          <a:lstStyle/>
+          <a:p>
+            <a:r>
+              <a:rPr dirty="0" err="1"/>
+              <a:t>useEffect</a:t>
+            </a:r>
+            <a:r>
+              <a:rPr dirty="0"/>
+              <a:t>(() =&gt; {</a:t>
+            </a:r>
+          </a:p>
+          <a:p>
+            <a:r>
+              <a:rPr dirty="0"/>
+              <a:t>  fetch('/</a:t>
+            </a:r>
+            <a:r>
+              <a:rPr dirty="0" err="1"/>
+              <a:t>api</a:t>
+            </a:r>
+            <a:r>
+              <a:rPr dirty="0"/>
+              <a:t>/refresh', {</a:t>
+            </a:r>
+          </a:p>
+          <a:p>
+            <a:r>
+              <a:rPr dirty="0"/>
+              <a:t>    method: 'POST',</a:t>
+            </a:r>
+          </a:p>
+          <a:p>
+            <a:r>
+              <a:rPr dirty="0"/>
+              <a:t>    credentials: 'include'  // sends cookie automatically</a:t>
+            </a:r>
+          </a:p>
+          <a:p>
+            <a:r>
+              <a:rPr dirty="0"/>
+              <a:t>  })</a:t>
+            </a:r>
+          </a:p>
+          <a:p>
+            <a:r>
+              <a:rPr dirty="0"/>
+              <a:t>  .then(res =&gt; </a:t>
+            </a:r>
+            <a:r>
+              <a:rPr dirty="0" err="1"/>
+              <a:t>res.json</a:t>
+            </a:r>
+            <a:r>
+              <a:rPr dirty="0"/>
+              <a:t>())</a:t>
+            </a:r>
+          </a:p>
+          <a:p>
+            <a:r>
+              <a:rPr dirty="0"/>
+              <a:t>  .then(data =&gt; </a:t>
+            </a:r>
+            <a:r>
+              <a:rPr dirty="0" err="1"/>
+              <a:t>setToken</a:t>
+            </a:r>
+            <a:r>
+              <a:rPr dirty="0"/>
+              <a:t>(</a:t>
+            </a:r>
+            <a:r>
+              <a:rPr dirty="0" err="1"/>
+              <a:t>data.token</a:t>
+            </a:r>
+            <a:r>
+              <a:rPr dirty="0"/>
+              <a:t>));</a:t>
+            </a:r>
+          </a:p>
+          <a:p>
+            <a:r>
+              <a:rPr dirty="0"/>
+              <a:t>}, []);</a:t>
+            </a:r>
+          </a:p>
+          <a:p>
+            <a:endParaRPr dirty="0"/>
+          </a:p>
+          <a:p>
+            <a:r>
+              <a:rPr dirty="0"/>
+              <a:t>Browser automatically attaches refresh cookie.</a:t>
+            </a:r>
+          </a:p>
+        </p:txBody>
+      </p:sp>
+    </p:spTree>
+  </p:cSld>
+  <p:clrMapOvr>
+    <a:masterClrMapping/>
+  </p:clrMapOvr>
+</p:sld>
+</file>
+
+<file path=ppt/slides/slide36.xml><?xml version="1.0" encoding="utf-8"?>
+<p:sld xmlns:a="http://schemas.openxmlformats.org/drawingml/2006/main" xmlns:r="http://schemas.openxmlformats.org/officeDocument/2006/relationships" xmlns:p="http://schemas.openxmlformats.org/presentationml/2006/main">
+  <p:cSld>
+    <p:spTree>
+      <p:nvGrpSpPr>
+        <p:cNvPr id="1" name=""/>
+        <p:cNvGrpSpPr/>
+        <p:nvPr/>
+      </p:nvGrpSpPr>
+      <p:grpSpPr>
+        <a:xfrm>
+          <a:off x="0" y="0"/>
+          <a:ext cx="0" cy="0"/>
+          <a:chOff x="0" y="0"/>
+          <a:chExt cx="0" cy="0"/>
+        </a:xfrm>
+      </p:grpSpPr>
+      <p:sp>
+        <p:nvSpPr>
+          <p:cNvPr id="2" name="Title 1"/>
+          <p:cNvSpPr>
+            <a:spLocks noGrp="1"/>
+          </p:cNvSpPr>
+          <p:nvPr>
+            <p:ph type="title"/>
+          </p:nvPr>
+        </p:nvSpPr>
+        <p:spPr/>
+        <p:txBody>
+          <a:bodyPr/>
+          <a:lstStyle/>
+          <a:p>
+            <a:r>
+              <a:t>Protected Route Call (Client)</a:t>
+            </a:r>
+          </a:p>
+        </p:txBody>
+      </p:sp>
+      <p:sp>
+        <p:nvSpPr>
+          <p:cNvPr id="3" name="Content Placeholder 2"/>
+          <p:cNvSpPr>
+            <a:spLocks noGrp="1"/>
+          </p:cNvSpPr>
+          <p:nvPr>
+            <p:ph idx="1"/>
+          </p:nvPr>
+        </p:nvSpPr>
+        <p:spPr/>
+        <p:txBody>
+          <a:bodyPr/>
+          <a:lstStyle/>
+          <a:p>
+            <a:r>
+              <a:rPr dirty="0"/>
+              <a:t>fetch('/</a:t>
+            </a:r>
+            <a:r>
+              <a:rPr dirty="0" err="1"/>
+              <a:t>api</a:t>
+            </a:r>
+            <a:r>
+              <a:rPr dirty="0"/>
+              <a:t>/secret', {</a:t>
+            </a:r>
+          </a:p>
+          <a:p>
+            <a:r>
+              <a:rPr dirty="0"/>
+              <a:t>  headers: {</a:t>
+            </a:r>
+          </a:p>
+          <a:p>
+            <a:r>
+              <a:rPr dirty="0"/>
+              <a:t>    Authorization: `Bearer ${token}`</a:t>
+            </a:r>
+          </a:p>
+          <a:p>
+            <a:r>
+              <a:rPr dirty="0"/>
+              <a:t>  }</a:t>
+            </a:r>
+          </a:p>
+          <a:p>
+            <a:r>
+              <a:rPr dirty="0"/>
+              <a:t>});</a:t>
+            </a:r>
+          </a:p>
+          <a:p>
+            <a:endParaRPr dirty="0"/>
+          </a:p>
+          <a:p>
+            <a:r>
+              <a:rPr dirty="0"/>
+              <a:t>Access token explicitly sent in header.</a:t>
+            </a:r>
+          </a:p>
+        </p:txBody>
+      </p:sp>
+    </p:spTree>
+  </p:cSld>
+  <p:clrMapOvr>
+    <a:masterClrMapping/>
+  </p:clrMapOvr>
+</p:sld>
+</file>
+
+<file path=ppt/slides/slide37.xml><?xml version="1.0" encoding="utf-8"?>
+<p:sld xmlns:a="http://schemas.openxmlformats.org/drawingml/2006/main" xmlns:r="http://schemas.openxmlformats.org/officeDocument/2006/relationships" xmlns:p="http://schemas.openxmlformats.org/presentationml/2006/main">
+  <p:cSld>
+    <p:spTree>
+      <p:nvGrpSpPr>
+        <p:cNvPr id="1" name=""/>
+        <p:cNvGrpSpPr/>
+        <p:nvPr/>
+      </p:nvGrpSpPr>
+      <p:grpSpPr>
+        <a:xfrm>
+          <a:off x="0" y="0"/>
+          <a:ext cx="0" cy="0"/>
+          <a:chOff x="0" y="0"/>
+          <a:chExt cx="0" cy="0"/>
+        </a:xfrm>
+      </p:grpSpPr>
+      <p:sp>
+        <p:nvSpPr>
+          <p:cNvPr id="2" name="Title 1"/>
+          <p:cNvSpPr>
+            <a:spLocks noGrp="1"/>
+          </p:cNvSpPr>
+          <p:nvPr>
+            <p:ph type="title"/>
+          </p:nvPr>
+        </p:nvSpPr>
+        <p:spPr/>
+        <p:txBody>
+          <a:bodyPr/>
+          <a:lstStyle/>
+          <a:p>
+            <a:r>
+              <a:t>Handling Expired Access Tokens</a:t>
+            </a:r>
+          </a:p>
+        </p:txBody>
+      </p:sp>
+      <p:sp>
+        <p:nvSpPr>
+          <p:cNvPr id="3" name="Content Placeholder 2"/>
+          <p:cNvSpPr>
+            <a:spLocks noGrp="1"/>
+          </p:cNvSpPr>
+          <p:nvPr>
+            <p:ph idx="1"/>
+          </p:nvPr>
+        </p:nvSpPr>
+        <p:spPr/>
+        <p:txBody>
+          <a:bodyPr>
+            <a:normAutofit/>
+          </a:bodyPr>
+          <a:lstStyle/>
+          <a:p>
+            <a:r>
+              <a:rPr dirty="0"/>
+              <a:t>If /</a:t>
+            </a:r>
+            <a:r>
+              <a:rPr dirty="0" err="1"/>
+              <a:t>api</a:t>
+            </a:r>
+            <a:r>
+              <a:rPr dirty="0"/>
+              <a:t>/secret returns 403:</a:t>
+            </a:r>
+          </a:p>
+          <a:p>
+            <a:r>
+              <a:rPr dirty="0"/>
+              <a:t>  1. </a:t>
+            </a:r>
+            <a:r>
+              <a:rPr sz="2400" dirty="0"/>
+              <a:t>Call</a:t>
+            </a:r>
+            <a:r>
+              <a:rPr dirty="0"/>
+              <a:t> /</a:t>
+            </a:r>
+            <a:r>
+              <a:rPr dirty="0" err="1"/>
+              <a:t>api</a:t>
+            </a:r>
+            <a:r>
+              <a:rPr dirty="0"/>
+              <a:t>/refresh (cookie auto-sent)</a:t>
+            </a:r>
+          </a:p>
+          <a:p>
+            <a:r>
+              <a:rPr dirty="0"/>
+              <a:t>  2. Receive new access token</a:t>
+            </a:r>
+          </a:p>
+          <a:p>
+            <a:r>
+              <a:rPr dirty="0"/>
+              <a:t>  3. Retry original request</a:t>
+            </a:r>
+          </a:p>
+          <a:p>
+            <a:endParaRPr dirty="0"/>
+          </a:p>
+          <a:p>
+            <a:r>
+              <a:rPr dirty="0"/>
+              <a:t>Refresh token never exposed to JS.</a:t>
+            </a:r>
+          </a:p>
+        </p:txBody>
+      </p:sp>
+    </p:spTree>
+  </p:cSld>
+  <p:clrMapOvr>
+    <a:masterClrMapping/>
+  </p:clrMapOvr>
+</p:sld>
+</file>
+
+<file path=ppt/slides/slide38.xml><?xml version="1.0" encoding="utf-8"?>
+<p:sld xmlns:a="http://schemas.openxmlformats.org/drawingml/2006/main" xmlns:r="http://schemas.openxmlformats.org/officeDocument/2006/relationships" xmlns:p="http://schemas.openxmlformats.org/presentationml/2006/main">
+  <p:cSld>
+    <p:spTree>
+      <p:nvGrpSpPr>
+        <p:cNvPr id="1" name=""/>
+        <p:cNvGrpSpPr/>
+        <p:nvPr/>
+      </p:nvGrpSpPr>
+      <p:grpSpPr>
+        <a:xfrm>
+          <a:off x="0" y="0"/>
+          <a:ext cx="0" cy="0"/>
+          <a:chOff x="0" y="0"/>
+          <a:chExt cx="0" cy="0"/>
+        </a:xfrm>
+      </p:grpSpPr>
+      <p:sp>
+        <p:nvSpPr>
+          <p:cNvPr id="2" name="Title 1"/>
+          <p:cNvSpPr>
+            <a:spLocks noGrp="1"/>
+          </p:cNvSpPr>
+          <p:nvPr>
+            <p:ph type="title"/>
+          </p:nvPr>
+        </p:nvSpPr>
+        <p:spPr/>
+        <p:txBody>
+          <a:bodyPr/>
+          <a:lstStyle/>
+          <a:p>
+            <a:r>
+              <a:t>Logout Flow</a:t>
+            </a:r>
+          </a:p>
+        </p:txBody>
+      </p:sp>
+      <p:sp>
+        <p:nvSpPr>
+          <p:cNvPr id="3" name="Content Placeholder 2"/>
+          <p:cNvSpPr>
+            <a:spLocks noGrp="1"/>
+          </p:cNvSpPr>
+          <p:nvPr>
+            <p:ph idx="1"/>
+          </p:nvPr>
+        </p:nvSpPr>
+        <p:spPr/>
+        <p:txBody>
+          <a:bodyPr/>
+          <a:lstStyle/>
+          <a:p>
+            <a:r>
+              <a:t>CLIENT:</a:t>
+            </a:r>
+          </a:p>
+          <a:p>
+            <a:r>
+              <a:t>  setToken(null);</a:t>
+            </a:r>
+          </a:p>
+          <a:p>
+            <a:r>
+              <a:t>  fetch('/api/logout', { credentials: 'include' });</a:t>
+            </a:r>
+          </a:p>
+          <a:p>
+            <a:endParaRPr/>
+          </a:p>
+          <a:p>
+            <a:r>
+              <a:t>SERVER:</a:t>
+            </a:r>
+          </a:p>
+          <a:p>
+            <a:r>
+              <a:t>  res.clearCookie('refreshToken');</a:t>
+            </a:r>
+          </a:p>
+          <a:p>
+            <a:r>
+              <a:t>  revoke token in DB/in-memory store</a:t>
+            </a:r>
+          </a:p>
+        </p:txBody>
+      </p:sp>
+    </p:spTree>
+  </p:cSld>
+  <p:clrMapOvr>
+    <a:masterClrMapping/>
+  </p:clrMapOvr>
+</p:sld>
+</file>
+
+<file path=ppt/slides/slide39.xml><?xml version="1.0" encoding="utf-8"?>
+<p:sld xmlns:a="http://schemas.openxmlformats.org/drawingml/2006/main" xmlns:r="http://schemas.openxmlformats.org/officeDocument/2006/relationships" xmlns:p="http://schemas.openxmlformats.org/presentationml/2006/main">
+  <p:cSld>
+    <p:spTree>
+      <p:nvGrpSpPr>
+        <p:cNvPr id="1" name=""/>
+        <p:cNvGrpSpPr/>
+        <p:nvPr/>
+      </p:nvGrpSpPr>
+      <p:grpSpPr>
+        <a:xfrm>
+          <a:off x="0" y="0"/>
+          <a:ext cx="0" cy="0"/>
+          <a:chOff x="0" y="0"/>
+          <a:chExt cx="0" cy="0"/>
+        </a:xfrm>
+      </p:grpSpPr>
+      <p:sp>
+        <p:nvSpPr>
+          <p:cNvPr id="2" name="Title 1"/>
+          <p:cNvSpPr>
+            <a:spLocks noGrp="1"/>
+          </p:cNvSpPr>
+          <p:nvPr>
+            <p:ph type="title"/>
+          </p:nvPr>
+        </p:nvSpPr>
+        <p:spPr/>
+        <p:txBody>
+          <a:bodyPr/>
+          <a:lstStyle/>
+          <a:p>
+            <a:r>
+              <a:t>Security Model Summary</a:t>
+            </a:r>
+          </a:p>
+        </p:txBody>
+      </p:sp>
+      <p:sp>
+        <p:nvSpPr>
+          <p:cNvPr id="3" name="Content Placeholder 2"/>
+          <p:cNvSpPr>
+            <a:spLocks noGrp="1"/>
+          </p:cNvSpPr>
+          <p:nvPr>
+            <p:ph idx="1"/>
+          </p:nvPr>
+        </p:nvSpPr>
+        <p:spPr/>
+        <p:txBody>
+          <a:bodyPr/>
+          <a:lstStyle/>
+          <a:p>
+            <a:r>
+              <a:t>XSS Protection:</a:t>
+            </a:r>
+          </a:p>
+          <a:p>
+            <a:r>
+              <a:t>  Refresh token cannot be read by JavaScript</a:t>
+            </a:r>
+          </a:p>
+          <a:p>
+            <a:endParaRPr/>
+          </a:p>
+          <a:p>
+            <a:r>
+              <a:t>CSRF Protection:</a:t>
+            </a:r>
+          </a:p>
+          <a:p>
+            <a:r>
+              <a:t>  sameSite='strict' on cookie</a:t>
+            </a:r>
+          </a:p>
+          <a:p>
+            <a:r>
+              <a:t>  Access token sent manually in header</a:t>
+            </a:r>
+          </a:p>
+          <a:p>
+            <a:endParaRPr/>
+          </a:p>
+          <a:p>
+            <a:r>
+              <a:t>Access token short lifetime limits damage window</a:t>
+            </a:r>
+          </a:p>
+        </p:txBody>
+      </p:sp>
+    </p:spTree>
   </p:cSld>
   <p:clrMapOvr>
     <a:masterClrMapping/>
@@ -12326,6 +14426,1160 @@
 </p:sld>
 </file>
 
+<file path=ppt/slides/slide40.xml><?xml version="1.0" encoding="utf-8"?>
+<p:sld xmlns:a="http://schemas.openxmlformats.org/drawingml/2006/main" xmlns:r="http://schemas.openxmlformats.org/officeDocument/2006/relationships" xmlns:p="http://schemas.openxmlformats.org/presentationml/2006/main">
+  <p:cSld>
+    <p:spTree>
+      <p:nvGrpSpPr>
+        <p:cNvPr id="1" name=""/>
+        <p:cNvGrpSpPr/>
+        <p:nvPr/>
+      </p:nvGrpSpPr>
+      <p:grpSpPr>
+        <a:xfrm>
+          <a:off x="0" y="0"/>
+          <a:ext cx="0" cy="0"/>
+          <a:chOff x="0" y="0"/>
+          <a:chExt cx="0" cy="0"/>
+        </a:xfrm>
+      </p:grpSpPr>
+      <p:sp>
+        <p:nvSpPr>
+          <p:cNvPr id="2" name="Title 1">
+            <a:extLst>
+              <a:ext uri="{FF2B5EF4-FFF2-40B4-BE49-F238E27FC236}">
+                <a16:creationId xmlns:a16="http://schemas.microsoft.com/office/drawing/2014/main" id="{9D5A70C9-9FAB-9D49-CE5A-9D05470DE6C5}"/>
+              </a:ext>
+            </a:extLst>
+          </p:cNvPr>
+          <p:cNvSpPr>
+            <a:spLocks noGrp="1"/>
+          </p:cNvSpPr>
+          <p:nvPr>
+            <p:ph type="title"/>
+          </p:nvPr>
+        </p:nvSpPr>
+        <p:spPr/>
+        <p:txBody>
+          <a:bodyPr/>
+          <a:lstStyle/>
+          <a:p>
+            <a:r>
+              <a:rPr lang="en-US" dirty="0"/>
+              <a:t>Backend as A Service</a:t>
+            </a:r>
+          </a:p>
+        </p:txBody>
+      </p:sp>
+      <p:sp>
+        <p:nvSpPr>
+          <p:cNvPr id="3" name="Text Placeholder 2">
+            <a:extLst>
+              <a:ext uri="{FF2B5EF4-FFF2-40B4-BE49-F238E27FC236}">
+                <a16:creationId xmlns:a16="http://schemas.microsoft.com/office/drawing/2014/main" id="{71465D47-110D-B834-4EA2-E4B479E069BA}"/>
+              </a:ext>
+            </a:extLst>
+          </p:cNvPr>
+          <p:cNvSpPr>
+            <a:spLocks noGrp="1"/>
+          </p:cNvSpPr>
+          <p:nvPr>
+            <p:ph type="body" idx="1"/>
+          </p:nvPr>
+        </p:nvSpPr>
+        <p:spPr/>
+        <p:txBody>
+          <a:bodyPr/>
+          <a:lstStyle/>
+          <a:p>
+            <a:r>
+              <a:rPr lang="en-US" dirty="0"/>
+              <a:t>One alternate way is to have a full backend as a service</a:t>
+            </a:r>
+          </a:p>
+          <a:p>
+            <a:pPr lvl="1"/>
+            <a:r>
+              <a:rPr lang="en-US" dirty="0">
+                <a:hlinkClick r:id="rId2"/>
+              </a:rPr>
+              <a:t>Firebase https://firebase.google.com</a:t>
+            </a:r>
+            <a:r>
+              <a:rPr lang="en-US" dirty="0"/>
+              <a:t> </a:t>
+            </a:r>
+          </a:p>
+          <a:p>
+            <a:pPr lvl="1"/>
+            <a:r>
+              <a:rPr lang="en-US" dirty="0" err="1"/>
+              <a:t>Supabase</a:t>
+            </a:r>
+            <a:r>
+              <a:rPr lang="en-US" dirty="0"/>
+              <a:t> </a:t>
+            </a:r>
+            <a:r>
+              <a:rPr lang="en-US" dirty="0">
+                <a:hlinkClick r:id="rId3"/>
+              </a:rPr>
+              <a:t>https://supabase.com</a:t>
+            </a:r>
+            <a:endParaRPr lang="en-US" dirty="0"/>
+          </a:p>
+          <a:p>
+            <a:pPr lvl="1"/>
+            <a:r>
+              <a:rPr lang="en-US" dirty="0"/>
+              <a:t>AWS Amplify </a:t>
+            </a:r>
+            <a:r>
+              <a:rPr lang="en-US" dirty="0">
+                <a:hlinkClick r:id="rId4"/>
+              </a:rPr>
+              <a:t>https://aws.amazon.com/amplify/</a:t>
+            </a:r>
+            <a:r>
+              <a:rPr lang="en-US" dirty="0"/>
+              <a:t> </a:t>
+            </a:r>
+          </a:p>
+          <a:p>
+            <a:pPr lvl="1"/>
+            <a:endParaRPr lang="en-US" dirty="0"/>
+          </a:p>
+          <a:p>
+            <a:pPr marL="615950" lvl="1" indent="0">
+              <a:buNone/>
+            </a:pPr>
+            <a:r>
+              <a:rPr lang="en-US" dirty="0"/>
+              <a:t>What are advantages of backend as a service providers? </a:t>
+            </a:r>
+          </a:p>
+          <a:p>
+            <a:pPr marL="615950" lvl="1" indent="0">
+              <a:buNone/>
+            </a:pPr>
+            <a:endParaRPr lang="en-US" dirty="0"/>
+          </a:p>
+          <a:p>
+            <a:pPr marL="615950" lvl="1" indent="0">
+              <a:buNone/>
+            </a:pPr>
+            <a:r>
+              <a:rPr lang="en-US" dirty="0"/>
+              <a:t>What are the drawbacks? </a:t>
+            </a:r>
+          </a:p>
+          <a:p>
+            <a:pPr marL="615950" lvl="1" indent="0">
+              <a:buNone/>
+            </a:pPr>
+            <a:endParaRPr lang="en-US" dirty="0"/>
+          </a:p>
+          <a:p>
+            <a:pPr marL="615950" lvl="1" indent="0">
+              <a:buNone/>
+            </a:pPr>
+            <a:r>
+              <a:rPr lang="en-US" dirty="0"/>
+              <a:t>	</a:t>
+            </a:r>
+          </a:p>
+        </p:txBody>
+      </p:sp>
+      <p:sp>
+        <p:nvSpPr>
+          <p:cNvPr id="4" name="Slide Number Placeholder 3">
+            <a:extLst>
+              <a:ext uri="{FF2B5EF4-FFF2-40B4-BE49-F238E27FC236}">
+                <a16:creationId xmlns:a16="http://schemas.microsoft.com/office/drawing/2014/main" id="{15ABE9DB-4983-15DB-C74E-812F8ED18C0D}"/>
+              </a:ext>
+            </a:extLst>
+          </p:cNvPr>
+          <p:cNvSpPr>
+            <a:spLocks noGrp="1"/>
+          </p:cNvSpPr>
+          <p:nvPr>
+            <p:ph type="sldNum" idx="12"/>
+          </p:nvPr>
+        </p:nvSpPr>
+        <p:spPr/>
+        <p:txBody>
+          <a:bodyPr/>
+          <a:lstStyle/>
+          <a:p>
+            <a:pPr marL="0" lvl="0" indent="0" algn="ctr" rtl="0">
+              <a:spcBef>
+                <a:spcPts val="0"/>
+              </a:spcBef>
+              <a:spcAft>
+                <a:spcPts val="0"/>
+              </a:spcAft>
+              <a:buNone/>
+            </a:pPr>
+            <a:fld id="{00000000-1234-1234-1234-123412341234}" type="slidenum">
+              <a:rPr lang="en-US" smtClean="0"/>
+              <a:t>40</a:t>
+            </a:fld>
+            <a:endParaRPr lang="en-US"/>
+          </a:p>
+        </p:txBody>
+      </p:sp>
+    </p:spTree>
+    <p:extLst>
+      <p:ext uri="{BB962C8B-B14F-4D97-AF65-F5344CB8AC3E}">
+        <p14:creationId xmlns:p14="http://schemas.microsoft.com/office/powerpoint/2010/main" val="1435923889"/>
+      </p:ext>
+    </p:extLst>
+  </p:cSld>
+  <p:clrMapOvr>
+    <a:masterClrMapping/>
+  </p:clrMapOvr>
+</p:sld>
+</file>
+
+<file path=ppt/slides/slide41.xml><?xml version="1.0" encoding="utf-8"?>
+<p:sld xmlns:a="http://schemas.openxmlformats.org/drawingml/2006/main" xmlns:r="http://schemas.openxmlformats.org/officeDocument/2006/relationships" xmlns:p="http://schemas.openxmlformats.org/presentationml/2006/main">
+  <p:cSld>
+    <p:spTree>
+      <p:nvGrpSpPr>
+        <p:cNvPr id="1" name=""/>
+        <p:cNvGrpSpPr/>
+        <p:nvPr/>
+      </p:nvGrpSpPr>
+      <p:grpSpPr>
+        <a:xfrm>
+          <a:off x="0" y="0"/>
+          <a:ext cx="0" cy="0"/>
+          <a:chOff x="0" y="0"/>
+          <a:chExt cx="0" cy="0"/>
+        </a:xfrm>
+      </p:grpSpPr>
+      <p:sp>
+        <p:nvSpPr>
+          <p:cNvPr id="2" name="Title 1">
+            <a:extLst>
+              <a:ext uri="{FF2B5EF4-FFF2-40B4-BE49-F238E27FC236}">
+                <a16:creationId xmlns:a16="http://schemas.microsoft.com/office/drawing/2014/main" id="{88C78996-2730-CF3D-C9C7-395DA6FE3A8B}"/>
+              </a:ext>
+            </a:extLst>
+          </p:cNvPr>
+          <p:cNvSpPr>
+            <a:spLocks noGrp="1"/>
+          </p:cNvSpPr>
+          <p:nvPr>
+            <p:ph type="title"/>
+          </p:nvPr>
+        </p:nvSpPr>
+        <p:spPr/>
+        <p:txBody>
+          <a:bodyPr/>
+          <a:lstStyle/>
+          <a:p>
+            <a:r>
+              <a:rPr lang="en-US" dirty="0"/>
+              <a:t>AWS Amplify</a:t>
+            </a:r>
+          </a:p>
+        </p:txBody>
+      </p:sp>
+      <p:sp>
+        <p:nvSpPr>
+          <p:cNvPr id="3" name="Text Placeholder 2">
+            <a:extLst>
+              <a:ext uri="{FF2B5EF4-FFF2-40B4-BE49-F238E27FC236}">
+                <a16:creationId xmlns:a16="http://schemas.microsoft.com/office/drawing/2014/main" id="{59B631E3-9496-99D4-C076-12781653BFB2}"/>
+              </a:ext>
+            </a:extLst>
+          </p:cNvPr>
+          <p:cNvSpPr>
+            <a:spLocks noGrp="1"/>
+          </p:cNvSpPr>
+          <p:nvPr>
+            <p:ph type="body" idx="1"/>
+          </p:nvPr>
+        </p:nvSpPr>
+        <p:spPr/>
+        <p:txBody>
+          <a:bodyPr/>
+          <a:lstStyle/>
+          <a:p>
+            <a:r>
+              <a:rPr lang="en-US" dirty="0">
+                <a:hlinkClick r:id="rId2"/>
+              </a:rPr>
+              <a:t>https://github.com/RPI-WS-spring-2026/amplify-vite-react-template</a:t>
+            </a:r>
+            <a:r>
+              <a:rPr lang="en-US" dirty="0"/>
+              <a:t> </a:t>
+            </a:r>
+          </a:p>
+          <a:p>
+            <a:endParaRPr lang="en-US" dirty="0"/>
+          </a:p>
+          <a:p>
+            <a:endParaRPr lang="en-US" dirty="0"/>
+          </a:p>
+        </p:txBody>
+      </p:sp>
+      <p:sp>
+        <p:nvSpPr>
+          <p:cNvPr id="4" name="Slide Number Placeholder 3">
+            <a:extLst>
+              <a:ext uri="{FF2B5EF4-FFF2-40B4-BE49-F238E27FC236}">
+                <a16:creationId xmlns:a16="http://schemas.microsoft.com/office/drawing/2014/main" id="{4695093A-A53B-9E32-9967-0C51F5137BD1}"/>
+              </a:ext>
+            </a:extLst>
+          </p:cNvPr>
+          <p:cNvSpPr>
+            <a:spLocks noGrp="1"/>
+          </p:cNvSpPr>
+          <p:nvPr>
+            <p:ph type="sldNum" idx="12"/>
+          </p:nvPr>
+        </p:nvSpPr>
+        <p:spPr/>
+        <p:txBody>
+          <a:bodyPr/>
+          <a:lstStyle/>
+          <a:p>
+            <a:pPr marL="0" lvl="0" indent="0" algn="ctr" rtl="0">
+              <a:spcBef>
+                <a:spcPts val="0"/>
+              </a:spcBef>
+              <a:spcAft>
+                <a:spcPts val="0"/>
+              </a:spcAft>
+              <a:buNone/>
+            </a:pPr>
+            <a:fld id="{00000000-1234-1234-1234-123412341234}" type="slidenum">
+              <a:rPr lang="en-US" smtClean="0"/>
+              <a:t>41</a:t>
+            </a:fld>
+            <a:endParaRPr lang="en-US"/>
+          </a:p>
+        </p:txBody>
+      </p:sp>
+    </p:spTree>
+    <p:extLst>
+      <p:ext uri="{BB962C8B-B14F-4D97-AF65-F5344CB8AC3E}">
+        <p14:creationId xmlns:p14="http://schemas.microsoft.com/office/powerpoint/2010/main" val="4196122357"/>
+      </p:ext>
+    </p:extLst>
+  </p:cSld>
+  <p:clrMapOvr>
+    <a:masterClrMapping/>
+  </p:clrMapOvr>
+</p:sld>
+</file>
+
+<file path=ppt/slides/slide42.xml><?xml version="1.0" encoding="utf-8"?>
+<p:sld xmlns:a="http://schemas.openxmlformats.org/drawingml/2006/main" xmlns:r="http://schemas.openxmlformats.org/officeDocument/2006/relationships" xmlns:p="http://schemas.openxmlformats.org/presentationml/2006/main">
+  <p:cSld>
+    <p:spTree>
+      <p:nvGrpSpPr>
+        <p:cNvPr id="1" name=""/>
+        <p:cNvGrpSpPr/>
+        <p:nvPr/>
+      </p:nvGrpSpPr>
+      <p:grpSpPr>
+        <a:xfrm>
+          <a:off x="0" y="0"/>
+          <a:ext cx="0" cy="0"/>
+          <a:chOff x="0" y="0"/>
+          <a:chExt cx="0" cy="0"/>
+        </a:xfrm>
+      </p:grpSpPr>
+      <p:sp>
+        <p:nvSpPr>
+          <p:cNvPr id="2" name="Title 1"/>
+          <p:cNvSpPr>
+            <a:spLocks noGrp="1"/>
+          </p:cNvSpPr>
+          <p:nvPr>
+            <p:ph type="title"/>
+          </p:nvPr>
+        </p:nvSpPr>
+        <p:spPr/>
+        <p:txBody>
+          <a:bodyPr/>
+          <a:lstStyle/>
+          <a:p>
+            <a:r>
+              <a:t>Backend as a Service (BaaS)</a:t>
+            </a:r>
+          </a:p>
+          <a:p>
+            <a:r>
+              <a:t>+ TypeScript Overview</a:t>
+            </a:r>
+          </a:p>
+        </p:txBody>
+      </p:sp>
+      <p:sp>
+        <p:nvSpPr>
+          <p:cNvPr id="3" name="Content Placeholder 2"/>
+          <p:cNvSpPr>
+            <a:spLocks noGrp="1"/>
+          </p:cNvSpPr>
+          <p:nvPr>
+            <p:ph idx="1"/>
+          </p:nvPr>
+        </p:nvSpPr>
+        <p:spPr/>
+        <p:txBody>
+          <a:bodyPr/>
+          <a:lstStyle/>
+          <a:p>
+            <a:r>
+              <a:t>Context: React + AWS Amplify Quickstart</a:t>
+            </a:r>
+          </a:p>
+          <a:p>
+            <a:endParaRPr/>
+          </a:p>
+          <a:p>
+            <a:r>
+              <a:t>What is BaaS?</a:t>
+            </a:r>
+          </a:p>
+          <a:p>
+            <a:r>
+              <a:t>Firebase | Supabase | AWS Amplify</a:t>
+            </a:r>
+          </a:p>
+          <a:p>
+            <a:endParaRPr/>
+          </a:p>
+          <a:p>
+            <a:r>
+              <a:t>Plus: What is TypeScript?</a:t>
+            </a:r>
+          </a:p>
+        </p:txBody>
+      </p:sp>
+    </p:spTree>
+  </p:cSld>
+  <p:clrMapOvr>
+    <a:masterClrMapping/>
+  </p:clrMapOvr>
+</p:sld>
+</file>
+
+<file path=ppt/slides/slide43.xml><?xml version="1.0" encoding="utf-8"?>
+<p:sld xmlns:a="http://schemas.openxmlformats.org/drawingml/2006/main" xmlns:r="http://schemas.openxmlformats.org/officeDocument/2006/relationships" xmlns:p="http://schemas.openxmlformats.org/presentationml/2006/main">
+  <p:cSld>
+    <p:spTree>
+      <p:nvGrpSpPr>
+        <p:cNvPr id="1" name=""/>
+        <p:cNvGrpSpPr/>
+        <p:nvPr/>
+      </p:nvGrpSpPr>
+      <p:grpSpPr>
+        <a:xfrm>
+          <a:off x="0" y="0"/>
+          <a:ext cx="0" cy="0"/>
+          <a:chOff x="0" y="0"/>
+          <a:chExt cx="0" cy="0"/>
+        </a:xfrm>
+      </p:grpSpPr>
+      <p:sp>
+        <p:nvSpPr>
+          <p:cNvPr id="2" name="Title 1"/>
+          <p:cNvSpPr>
+            <a:spLocks noGrp="1"/>
+          </p:cNvSpPr>
+          <p:nvPr>
+            <p:ph type="title"/>
+          </p:nvPr>
+        </p:nvSpPr>
+        <p:spPr/>
+        <p:txBody>
+          <a:bodyPr/>
+          <a:lstStyle/>
+          <a:p>
+            <a:r>
+              <a:t>What is Backend as a Service (BaaS)?</a:t>
+            </a:r>
+          </a:p>
+        </p:txBody>
+      </p:sp>
+      <p:sp>
+        <p:nvSpPr>
+          <p:cNvPr id="3" name="Content Placeholder 2"/>
+          <p:cNvSpPr>
+            <a:spLocks noGrp="1"/>
+          </p:cNvSpPr>
+          <p:nvPr>
+            <p:ph idx="1"/>
+          </p:nvPr>
+        </p:nvSpPr>
+        <p:spPr/>
+        <p:txBody>
+          <a:bodyPr/>
+          <a:lstStyle/>
+          <a:p>
+            <a:r>
+              <a:t>BaaS = Cloud-managed backend infrastructure</a:t>
+            </a:r>
+          </a:p>
+          <a:p>
+            <a:endParaRPr/>
+          </a:p>
+          <a:p>
+            <a:r>
+              <a:t>Instead of building your own backend:</a:t>
+            </a:r>
+          </a:p>
+          <a:p>
+            <a:r>
+              <a:t>• Auth handled for you</a:t>
+            </a:r>
+          </a:p>
+          <a:p>
+            <a:r>
+              <a:t>• Database hosted for you</a:t>
+            </a:r>
+          </a:p>
+          <a:p>
+            <a:r>
+              <a:t>• APIs auto-generated</a:t>
+            </a:r>
+          </a:p>
+          <a:p>
+            <a:r>
+              <a:t>• File storage included</a:t>
+            </a:r>
+          </a:p>
+          <a:p>
+            <a:endParaRPr/>
+          </a:p>
+          <a:p>
+            <a:r>
+              <a:t>You focus on frontend + business logic</a:t>
+            </a:r>
+          </a:p>
+        </p:txBody>
+      </p:sp>
+    </p:spTree>
+  </p:cSld>
+  <p:clrMapOvr>
+    <a:masterClrMapping/>
+  </p:clrMapOvr>
+</p:sld>
+</file>
+
+<file path=ppt/slides/slide44.xml><?xml version="1.0" encoding="utf-8"?>
+<p:sld xmlns:a="http://schemas.openxmlformats.org/drawingml/2006/main" xmlns:r="http://schemas.openxmlformats.org/officeDocument/2006/relationships" xmlns:p="http://schemas.openxmlformats.org/presentationml/2006/main">
+  <p:cSld>
+    <p:spTree>
+      <p:nvGrpSpPr>
+        <p:cNvPr id="1" name=""/>
+        <p:cNvGrpSpPr/>
+        <p:nvPr/>
+      </p:nvGrpSpPr>
+      <p:grpSpPr>
+        <a:xfrm>
+          <a:off x="0" y="0"/>
+          <a:ext cx="0" cy="0"/>
+          <a:chOff x="0" y="0"/>
+          <a:chExt cx="0" cy="0"/>
+        </a:xfrm>
+      </p:grpSpPr>
+      <p:sp>
+        <p:nvSpPr>
+          <p:cNvPr id="2" name="Title 1"/>
+          <p:cNvSpPr>
+            <a:spLocks noGrp="1"/>
+          </p:cNvSpPr>
+          <p:nvPr>
+            <p:ph type="title"/>
+          </p:nvPr>
+        </p:nvSpPr>
+        <p:spPr/>
+        <p:txBody>
+          <a:bodyPr/>
+          <a:lstStyle/>
+          <a:p>
+            <a:r>
+              <a:t>Core Services Provided by BaaS</a:t>
+            </a:r>
+          </a:p>
+        </p:txBody>
+      </p:sp>
+      <p:sp>
+        <p:nvSpPr>
+          <p:cNvPr id="3" name="Content Placeholder 2"/>
+          <p:cNvSpPr>
+            <a:spLocks noGrp="1"/>
+          </p:cNvSpPr>
+          <p:nvPr>
+            <p:ph idx="1"/>
+          </p:nvPr>
+        </p:nvSpPr>
+        <p:spPr/>
+        <p:txBody>
+          <a:bodyPr/>
+          <a:lstStyle/>
+          <a:p>
+            <a:r>
+              <a:t>1. Authentication (email, OAuth, MFA)</a:t>
+            </a:r>
+          </a:p>
+          <a:p>
+            <a:r>
+              <a:t>2. Database (SQL or NoSQL)</a:t>
+            </a:r>
+          </a:p>
+          <a:p>
+            <a:r>
+              <a:t>3. Auto-generated APIs</a:t>
+            </a:r>
+          </a:p>
+          <a:p>
+            <a:r>
+              <a:t>4. File storage</a:t>
+            </a:r>
+          </a:p>
+          <a:p>
+            <a:r>
+              <a:t>5. Hosting + CI/CD</a:t>
+            </a:r>
+          </a:p>
+          <a:p>
+            <a:r>
+              <a:t>6. Security rules &amp; access control</a:t>
+            </a:r>
+          </a:p>
+        </p:txBody>
+      </p:sp>
+    </p:spTree>
+  </p:cSld>
+  <p:clrMapOvr>
+    <a:masterClrMapping/>
+  </p:clrMapOvr>
+</p:sld>
+</file>
+
+<file path=ppt/slides/slide45.xml><?xml version="1.0" encoding="utf-8"?>
+<p:sld xmlns:a="http://schemas.openxmlformats.org/drawingml/2006/main" xmlns:r="http://schemas.openxmlformats.org/officeDocument/2006/relationships" xmlns:p="http://schemas.openxmlformats.org/presentationml/2006/main">
+  <p:cSld>
+    <p:spTree>
+      <p:nvGrpSpPr>
+        <p:cNvPr id="1" name=""/>
+        <p:cNvGrpSpPr/>
+        <p:nvPr/>
+      </p:nvGrpSpPr>
+      <p:grpSpPr>
+        <a:xfrm>
+          <a:off x="0" y="0"/>
+          <a:ext cx="0" cy="0"/>
+          <a:chOff x="0" y="0"/>
+          <a:chExt cx="0" cy="0"/>
+        </a:xfrm>
+      </p:grpSpPr>
+      <p:sp>
+        <p:nvSpPr>
+          <p:cNvPr id="2" name="Title 1"/>
+          <p:cNvSpPr>
+            <a:spLocks noGrp="1"/>
+          </p:cNvSpPr>
+          <p:nvPr>
+            <p:ph type="title"/>
+          </p:nvPr>
+        </p:nvSpPr>
+        <p:spPr/>
+        <p:txBody>
+          <a:bodyPr/>
+          <a:lstStyle/>
+          <a:p>
+            <a:r>
+              <a:t>Firebase (Google)</a:t>
+            </a:r>
+          </a:p>
+        </p:txBody>
+      </p:sp>
+      <p:sp>
+        <p:nvSpPr>
+          <p:cNvPr id="3" name="Content Placeholder 2"/>
+          <p:cNvSpPr>
+            <a:spLocks noGrp="1"/>
+          </p:cNvSpPr>
+          <p:nvPr>
+            <p:ph idx="1"/>
+          </p:nvPr>
+        </p:nvSpPr>
+        <p:spPr/>
+        <p:txBody>
+          <a:bodyPr/>
+          <a:lstStyle/>
+          <a:p>
+            <a:r>
+              <a:t>Database: Firestore (NoSQL, document-based)</a:t>
+            </a:r>
+          </a:p>
+          <a:p>
+            <a:r>
+              <a:t>Auth: Built-in providers</a:t>
+            </a:r>
+          </a:p>
+          <a:p>
+            <a:r>
+              <a:t>Cloud Functions + Hosting</a:t>
+            </a:r>
+          </a:p>
+          <a:p>
+            <a:endParaRPr/>
+          </a:p>
+          <a:p>
+            <a:r>
+              <a:t>Strengths:</a:t>
+            </a:r>
+          </a:p>
+          <a:p>
+            <a:r>
+              <a:t>• Very fast to start</a:t>
+            </a:r>
+          </a:p>
+          <a:p>
+            <a:r>
+              <a:t>• Strong real-time support</a:t>
+            </a:r>
+          </a:p>
+          <a:p>
+            <a:endParaRPr/>
+          </a:p>
+          <a:p>
+            <a:r>
+              <a:t>Tradeoff: NoSQL structure, vendor lock-in</a:t>
+            </a:r>
+          </a:p>
+        </p:txBody>
+      </p:sp>
+    </p:spTree>
+  </p:cSld>
+  <p:clrMapOvr>
+    <a:masterClrMapping/>
+  </p:clrMapOvr>
+</p:sld>
+</file>
+
+<file path=ppt/slides/slide46.xml><?xml version="1.0" encoding="utf-8"?>
+<p:sld xmlns:a="http://schemas.openxmlformats.org/drawingml/2006/main" xmlns:r="http://schemas.openxmlformats.org/officeDocument/2006/relationships" xmlns:p="http://schemas.openxmlformats.org/presentationml/2006/main">
+  <p:cSld>
+    <p:spTree>
+      <p:nvGrpSpPr>
+        <p:cNvPr id="1" name=""/>
+        <p:cNvGrpSpPr/>
+        <p:nvPr/>
+      </p:nvGrpSpPr>
+      <p:grpSpPr>
+        <a:xfrm>
+          <a:off x="0" y="0"/>
+          <a:ext cx="0" cy="0"/>
+          <a:chOff x="0" y="0"/>
+          <a:chExt cx="0" cy="0"/>
+        </a:xfrm>
+      </p:grpSpPr>
+      <p:sp>
+        <p:nvSpPr>
+          <p:cNvPr id="2" name="Title 1"/>
+          <p:cNvSpPr>
+            <a:spLocks noGrp="1"/>
+          </p:cNvSpPr>
+          <p:nvPr>
+            <p:ph type="title"/>
+          </p:nvPr>
+        </p:nvSpPr>
+        <p:spPr/>
+        <p:txBody>
+          <a:bodyPr/>
+          <a:lstStyle/>
+          <a:p>
+            <a:r>
+              <a:t>Supabase</a:t>
+            </a:r>
+          </a:p>
+        </p:txBody>
+      </p:sp>
+      <p:sp>
+        <p:nvSpPr>
+          <p:cNvPr id="3" name="Content Placeholder 2"/>
+          <p:cNvSpPr>
+            <a:spLocks noGrp="1"/>
+          </p:cNvSpPr>
+          <p:nvPr>
+            <p:ph idx="1"/>
+          </p:nvPr>
+        </p:nvSpPr>
+        <p:spPr/>
+        <p:txBody>
+          <a:bodyPr/>
+          <a:lstStyle/>
+          <a:p>
+            <a:r>
+              <a:t>Open-source Firebase alternative</a:t>
+            </a:r>
+          </a:p>
+          <a:p>
+            <a:r>
+              <a:t>Database: PostgreSQL (SQL, relational)</a:t>
+            </a:r>
+          </a:p>
+          <a:p>
+            <a:r>
+              <a:t>Auto-generated REST + GraphQL APIs</a:t>
+            </a:r>
+          </a:p>
+          <a:p>
+            <a:endParaRPr/>
+          </a:p>
+          <a:p>
+            <a:r>
+              <a:t>Strengths:</a:t>
+            </a:r>
+          </a:p>
+          <a:p>
+            <a:r>
+              <a:t>• Real SQL database</a:t>
+            </a:r>
+          </a:p>
+          <a:p>
+            <a:r>
+              <a:t>• Open-source flexibility</a:t>
+            </a:r>
+          </a:p>
+          <a:p>
+            <a:endParaRPr/>
+          </a:p>
+          <a:p>
+            <a:r>
+              <a:t>Tradeoff: Slightly more setup</a:t>
+            </a:r>
+          </a:p>
+        </p:txBody>
+      </p:sp>
+    </p:spTree>
+  </p:cSld>
+  <p:clrMapOvr>
+    <a:masterClrMapping/>
+  </p:clrMapOvr>
+</p:sld>
+</file>
+
+<file path=ppt/slides/slide47.xml><?xml version="1.0" encoding="utf-8"?>
+<p:sld xmlns:a="http://schemas.openxmlformats.org/drawingml/2006/main" xmlns:r="http://schemas.openxmlformats.org/officeDocument/2006/relationships" xmlns:p="http://schemas.openxmlformats.org/presentationml/2006/main">
+  <p:cSld>
+    <p:spTree>
+      <p:nvGrpSpPr>
+        <p:cNvPr id="1" name=""/>
+        <p:cNvGrpSpPr/>
+        <p:nvPr/>
+      </p:nvGrpSpPr>
+      <p:grpSpPr>
+        <a:xfrm>
+          <a:off x="0" y="0"/>
+          <a:ext cx="0" cy="0"/>
+          <a:chOff x="0" y="0"/>
+          <a:chExt cx="0" cy="0"/>
+        </a:xfrm>
+      </p:grpSpPr>
+      <p:sp>
+        <p:nvSpPr>
+          <p:cNvPr id="2" name="Title 1"/>
+          <p:cNvSpPr>
+            <a:spLocks noGrp="1"/>
+          </p:cNvSpPr>
+          <p:nvPr>
+            <p:ph type="title"/>
+          </p:nvPr>
+        </p:nvSpPr>
+        <p:spPr/>
+        <p:txBody>
+          <a:bodyPr/>
+          <a:lstStyle/>
+          <a:p>
+            <a:r>
+              <a:t>AWS Amplify</a:t>
+            </a:r>
+          </a:p>
+        </p:txBody>
+      </p:sp>
+      <p:sp>
+        <p:nvSpPr>
+          <p:cNvPr id="3" name="Content Placeholder 2"/>
+          <p:cNvSpPr>
+            <a:spLocks noGrp="1"/>
+          </p:cNvSpPr>
+          <p:nvPr>
+            <p:ph idx="1"/>
+          </p:nvPr>
+        </p:nvSpPr>
+        <p:spPr/>
+        <p:txBody>
+          <a:bodyPr/>
+          <a:lstStyle/>
+          <a:p>
+            <a:r>
+              <a:rPr dirty="0"/>
+              <a:t>Built on AWS services (Cognito, AppSync, DynamoDB, S3)</a:t>
+            </a:r>
+          </a:p>
+          <a:p>
+            <a:r>
+              <a:rPr dirty="0"/>
+              <a:t>Strong React integration</a:t>
+            </a:r>
+          </a:p>
+          <a:p>
+            <a:endParaRPr dirty="0"/>
+          </a:p>
+          <a:p>
+            <a:r>
+              <a:rPr dirty="0"/>
+              <a:t>Provides:</a:t>
+            </a:r>
+          </a:p>
+          <a:p>
+            <a:r>
+              <a:rPr dirty="0"/>
+              <a:t>• Authentication (Cognito)</a:t>
+            </a:r>
+          </a:p>
+          <a:p>
+            <a:r>
+              <a:rPr dirty="0"/>
+              <a:t>• </a:t>
+            </a:r>
+            <a:r>
+              <a:rPr dirty="0" err="1"/>
+              <a:t>GraphQL</a:t>
+            </a:r>
+            <a:r>
+              <a:rPr dirty="0"/>
+              <a:t> / REST APIs</a:t>
+            </a:r>
+          </a:p>
+          <a:p>
+            <a:r>
+              <a:rPr dirty="0"/>
+              <a:t>• Storage (S3)</a:t>
+            </a:r>
+          </a:p>
+          <a:p>
+            <a:r>
+              <a:rPr dirty="0"/>
+              <a:t>• Hosting + CI/CD</a:t>
+            </a:r>
+          </a:p>
+          <a:p>
+            <a:r>
+              <a:rPr dirty="0"/>
+              <a:t>Enterprise-ready and scalable</a:t>
+            </a:r>
+          </a:p>
+        </p:txBody>
+      </p:sp>
+    </p:spTree>
+  </p:cSld>
+  <p:clrMapOvr>
+    <a:masterClrMapping/>
+  </p:clrMapOvr>
+</p:sld>
+</file>
+
+<file path=ppt/slides/slide48.xml><?xml version="1.0" encoding="utf-8"?>
+<p:sld xmlns:a="http://schemas.openxmlformats.org/drawingml/2006/main" xmlns:r="http://schemas.openxmlformats.org/officeDocument/2006/relationships" xmlns:p="http://schemas.openxmlformats.org/presentationml/2006/main">
+  <p:cSld>
+    <p:spTree>
+      <p:nvGrpSpPr>
+        <p:cNvPr id="1" name=""/>
+        <p:cNvGrpSpPr/>
+        <p:nvPr/>
+      </p:nvGrpSpPr>
+      <p:grpSpPr>
+        <a:xfrm>
+          <a:off x="0" y="0"/>
+          <a:ext cx="0" cy="0"/>
+          <a:chOff x="0" y="0"/>
+          <a:chExt cx="0" cy="0"/>
+        </a:xfrm>
+      </p:grpSpPr>
+      <p:sp>
+        <p:nvSpPr>
+          <p:cNvPr id="2" name="Title 1"/>
+          <p:cNvSpPr>
+            <a:spLocks noGrp="1"/>
+          </p:cNvSpPr>
+          <p:nvPr>
+            <p:ph type="title"/>
+          </p:nvPr>
+        </p:nvSpPr>
+        <p:spPr/>
+        <p:txBody>
+          <a:bodyPr/>
+          <a:lstStyle/>
+          <a:p>
+            <a:r>
+              <a:t>How Amplify Works in React</a:t>
+            </a:r>
+          </a:p>
+        </p:txBody>
+      </p:sp>
+      <p:sp>
+        <p:nvSpPr>
+          <p:cNvPr id="3" name="Content Placeholder 2"/>
+          <p:cNvSpPr>
+            <a:spLocks noGrp="1"/>
+          </p:cNvSpPr>
+          <p:nvPr>
+            <p:ph idx="1"/>
+          </p:nvPr>
+        </p:nvSpPr>
+        <p:spPr/>
+        <p:txBody>
+          <a:bodyPr/>
+          <a:lstStyle/>
+          <a:p>
+            <a:r>
+              <a:t>Install Amplify libraries</a:t>
+            </a:r>
+          </a:p>
+          <a:p>
+            <a:r>
+              <a:t>Configure backend via CLI or Amplify Studio</a:t>
+            </a:r>
+          </a:p>
+          <a:p>
+            <a:endParaRPr/>
+          </a:p>
+          <a:p>
+            <a:r>
+              <a:t>Example:</a:t>
+            </a:r>
+          </a:p>
+          <a:p>
+            <a:r>
+              <a:t>import { Amplify } from 'aws-amplify';</a:t>
+            </a:r>
+          </a:p>
+          <a:p>
+            <a:r>
+              <a:t>import config from './amplifyconfiguration.json';</a:t>
+            </a:r>
+          </a:p>
+          <a:p>
+            <a:r>
+              <a:t>Amplify.configure(config);</a:t>
+            </a:r>
+          </a:p>
+        </p:txBody>
+      </p:sp>
+    </p:spTree>
+  </p:cSld>
+  <p:clrMapOvr>
+    <a:masterClrMapping/>
+  </p:clrMapOvr>
+</p:sld>
+</file>
+
+<file path=ppt/slides/slide49.xml><?xml version="1.0" encoding="utf-8"?>
+<p:sld xmlns:a="http://schemas.openxmlformats.org/drawingml/2006/main" xmlns:r="http://schemas.openxmlformats.org/officeDocument/2006/relationships" xmlns:p="http://schemas.openxmlformats.org/presentationml/2006/main">
+  <p:cSld>
+    <p:spTree>
+      <p:nvGrpSpPr>
+        <p:cNvPr id="1" name=""/>
+        <p:cNvGrpSpPr/>
+        <p:nvPr/>
+      </p:nvGrpSpPr>
+      <p:grpSpPr>
+        <a:xfrm>
+          <a:off x="0" y="0"/>
+          <a:ext cx="0" cy="0"/>
+          <a:chOff x="0" y="0"/>
+          <a:chExt cx="0" cy="0"/>
+        </a:xfrm>
+      </p:grpSpPr>
+      <p:sp>
+        <p:nvSpPr>
+          <p:cNvPr id="2" name="Title 1"/>
+          <p:cNvSpPr>
+            <a:spLocks noGrp="1"/>
+          </p:cNvSpPr>
+          <p:nvPr>
+            <p:ph type="title"/>
+          </p:nvPr>
+        </p:nvSpPr>
+        <p:spPr/>
+        <p:txBody>
+          <a:bodyPr/>
+          <a:lstStyle/>
+          <a:p>
+            <a:r>
+              <a:t>What is TypeScript?</a:t>
+            </a:r>
+          </a:p>
+        </p:txBody>
+      </p:sp>
+      <p:sp>
+        <p:nvSpPr>
+          <p:cNvPr id="3" name="Content Placeholder 2"/>
+          <p:cNvSpPr>
+            <a:spLocks noGrp="1"/>
+          </p:cNvSpPr>
+          <p:nvPr>
+            <p:ph idx="1"/>
+          </p:nvPr>
+        </p:nvSpPr>
+        <p:spPr/>
+        <p:txBody>
+          <a:bodyPr/>
+          <a:lstStyle/>
+          <a:p>
+            <a:r>
+              <a:t>TypeScript = JavaScript + Static Types</a:t>
+            </a:r>
+          </a:p>
+          <a:p>
+            <a:endParaRPr/>
+          </a:p>
+          <a:p>
+            <a:r>
+              <a:t>Developed by Microsoft</a:t>
+            </a:r>
+          </a:p>
+          <a:p>
+            <a:r>
+              <a:t>Adds compile-time type checking</a:t>
+            </a:r>
+          </a:p>
+          <a:p>
+            <a:r>
+              <a:t>Compiles into standard JavaScript</a:t>
+            </a:r>
+          </a:p>
+          <a:p>
+            <a:endParaRPr/>
+          </a:p>
+          <a:p>
+            <a:r>
+              <a:t>Improves safety + developer experience</a:t>
+            </a:r>
+          </a:p>
+        </p:txBody>
+      </p:sp>
+    </p:spTree>
+  </p:cSld>
+  <p:clrMapOvr>
+    <a:masterClrMapping/>
+  </p:clrMapOvr>
+</p:sld>
+</file>
+
 <file path=ppt/slides/slide5.xml><?xml version="1.0" encoding="utf-8"?>
 <p:sld xmlns:a="http://schemas.openxmlformats.org/drawingml/2006/main" xmlns:r="http://schemas.openxmlformats.org/officeDocument/2006/relationships" xmlns:p="http://schemas.openxmlformats.org/presentationml/2006/main">
   <p:cSld>
@@ -12517,6 +15771,397 @@
         <p14:creationId xmlns:p14="http://schemas.microsoft.com/office/powerpoint/2010/main" val="1088581155"/>
       </p:ext>
     </p:extLst>
+  </p:cSld>
+  <p:clrMapOvr>
+    <a:masterClrMapping/>
+  </p:clrMapOvr>
+</p:sld>
+</file>
+
+<file path=ppt/slides/slide50.xml><?xml version="1.0" encoding="utf-8"?>
+<p:sld xmlns:a="http://schemas.openxmlformats.org/drawingml/2006/main" xmlns:r="http://schemas.openxmlformats.org/officeDocument/2006/relationships" xmlns:p="http://schemas.openxmlformats.org/presentationml/2006/main">
+  <p:cSld>
+    <p:spTree>
+      <p:nvGrpSpPr>
+        <p:cNvPr id="1" name=""/>
+        <p:cNvGrpSpPr/>
+        <p:nvPr/>
+      </p:nvGrpSpPr>
+      <p:grpSpPr>
+        <a:xfrm>
+          <a:off x="0" y="0"/>
+          <a:ext cx="0" cy="0"/>
+          <a:chOff x="0" y="0"/>
+          <a:chExt cx="0" cy="0"/>
+        </a:xfrm>
+      </p:grpSpPr>
+      <p:sp>
+        <p:nvSpPr>
+          <p:cNvPr id="2" name="Title 1"/>
+          <p:cNvSpPr>
+            <a:spLocks noGrp="1"/>
+          </p:cNvSpPr>
+          <p:nvPr>
+            <p:ph type="title"/>
+          </p:nvPr>
+        </p:nvSpPr>
+        <p:spPr/>
+        <p:txBody>
+          <a:bodyPr/>
+          <a:lstStyle/>
+          <a:p>
+            <a:r>
+              <a:t>Why TypeScript in Amplify?</a:t>
+            </a:r>
+          </a:p>
+        </p:txBody>
+      </p:sp>
+      <p:sp>
+        <p:nvSpPr>
+          <p:cNvPr id="3" name="Content Placeholder 2"/>
+          <p:cNvSpPr>
+            <a:spLocks noGrp="1"/>
+          </p:cNvSpPr>
+          <p:nvPr>
+            <p:ph idx="1"/>
+          </p:nvPr>
+        </p:nvSpPr>
+        <p:spPr/>
+        <p:txBody>
+          <a:bodyPr/>
+          <a:lstStyle/>
+          <a:p>
+            <a:r>
+              <a:t>Amplify generates typed models</a:t>
+            </a:r>
+          </a:p>
+          <a:p>
+            <a:r>
+              <a:t>Better IDE autocomplete</a:t>
+            </a:r>
+          </a:p>
+          <a:p>
+            <a:r>
+              <a:t>Catches errors before runtime</a:t>
+            </a:r>
+          </a:p>
+          <a:p>
+            <a:endParaRPr/>
+          </a:p>
+          <a:p>
+            <a:r>
+              <a:t>Example:</a:t>
+            </a:r>
+          </a:p>
+          <a:p>
+            <a:r>
+              <a:t>function greet(name: string): string {</a:t>
+            </a:r>
+          </a:p>
+          <a:p>
+            <a:r>
+              <a:t>  return 'Hello ' + name;</a:t>
+            </a:r>
+          </a:p>
+          <a:p>
+            <a:r>
+              <a:t>}</a:t>
+            </a:r>
+          </a:p>
+        </p:txBody>
+      </p:sp>
+    </p:spTree>
+  </p:cSld>
+  <p:clrMapOvr>
+    <a:masterClrMapping/>
+  </p:clrMapOvr>
+</p:sld>
+</file>
+
+<file path=ppt/slides/slide51.xml><?xml version="1.0" encoding="utf-8"?>
+<p:sld xmlns:a="http://schemas.openxmlformats.org/drawingml/2006/main" xmlns:r="http://schemas.openxmlformats.org/officeDocument/2006/relationships" xmlns:p="http://schemas.openxmlformats.org/presentationml/2006/main">
+  <p:cSld>
+    <p:spTree>
+      <p:nvGrpSpPr>
+        <p:cNvPr id="1" name=""/>
+        <p:cNvGrpSpPr/>
+        <p:nvPr/>
+      </p:nvGrpSpPr>
+      <p:grpSpPr>
+        <a:xfrm>
+          <a:off x="0" y="0"/>
+          <a:ext cx="0" cy="0"/>
+          <a:chOff x="0" y="0"/>
+          <a:chExt cx="0" cy="0"/>
+        </a:xfrm>
+      </p:grpSpPr>
+      <p:sp>
+        <p:nvSpPr>
+          <p:cNvPr id="2" name="Title 1"/>
+          <p:cNvSpPr>
+            <a:spLocks noGrp="1"/>
+          </p:cNvSpPr>
+          <p:nvPr>
+            <p:ph type="title"/>
+          </p:nvPr>
+        </p:nvSpPr>
+        <p:spPr/>
+        <p:txBody>
+          <a:bodyPr/>
+          <a:lstStyle/>
+          <a:p>
+            <a:r>
+              <a:t>JavaScript vs TypeScript</a:t>
+            </a:r>
+          </a:p>
+        </p:txBody>
+      </p:sp>
+      <p:sp>
+        <p:nvSpPr>
+          <p:cNvPr id="3" name="Content Placeholder 2"/>
+          <p:cNvSpPr>
+            <a:spLocks noGrp="1"/>
+          </p:cNvSpPr>
+          <p:nvPr>
+            <p:ph idx="1"/>
+          </p:nvPr>
+        </p:nvSpPr>
+        <p:spPr/>
+        <p:txBody>
+          <a:bodyPr/>
+          <a:lstStyle/>
+          <a:p>
+            <a:r>
+              <a:t>JavaScript:</a:t>
+            </a:r>
+          </a:p>
+          <a:p>
+            <a:r>
+              <a:t>  let age = 25;</a:t>
+            </a:r>
+          </a:p>
+          <a:p>
+            <a:endParaRPr/>
+          </a:p>
+          <a:p>
+            <a:r>
+              <a:t>TypeScript:</a:t>
+            </a:r>
+          </a:p>
+          <a:p>
+            <a:r>
+              <a:t>  let age: number = 25;</a:t>
+            </a:r>
+          </a:p>
+          <a:p>
+            <a:endParaRPr/>
+          </a:p>
+          <a:p>
+            <a:r>
+              <a:t>Prevents: age = 'twenty five'; ❌</a:t>
+            </a:r>
+          </a:p>
+        </p:txBody>
+      </p:sp>
+    </p:spTree>
+  </p:cSld>
+  <p:clrMapOvr>
+    <a:masterClrMapping/>
+  </p:clrMapOvr>
+</p:sld>
+</file>
+
+<file path=ppt/slides/slide52.xml><?xml version="1.0" encoding="utf-8"?>
+<p:sld xmlns:a="http://schemas.openxmlformats.org/drawingml/2006/main" xmlns:r="http://schemas.openxmlformats.org/officeDocument/2006/relationships" xmlns:p="http://schemas.openxmlformats.org/presentationml/2006/main">
+  <p:cSld>
+    <p:spTree>
+      <p:nvGrpSpPr>
+        <p:cNvPr id="1" name=""/>
+        <p:cNvGrpSpPr/>
+        <p:nvPr/>
+      </p:nvGrpSpPr>
+      <p:grpSpPr>
+        <a:xfrm>
+          <a:off x="0" y="0"/>
+          <a:ext cx="0" cy="0"/>
+          <a:chOff x="0" y="0"/>
+          <a:chExt cx="0" cy="0"/>
+        </a:xfrm>
+      </p:grpSpPr>
+      <p:sp>
+        <p:nvSpPr>
+          <p:cNvPr id="2" name="Title 1"/>
+          <p:cNvSpPr>
+            <a:spLocks noGrp="1"/>
+          </p:cNvSpPr>
+          <p:nvPr>
+            <p:ph type="title"/>
+          </p:nvPr>
+        </p:nvSpPr>
+        <p:spPr/>
+        <p:txBody>
+          <a:bodyPr/>
+          <a:lstStyle/>
+          <a:p>
+            <a:r>
+              <a:t>When to Use BaaS vs Custom Backend</a:t>
+            </a:r>
+          </a:p>
+        </p:txBody>
+      </p:sp>
+      <p:sp>
+        <p:nvSpPr>
+          <p:cNvPr id="3" name="Content Placeholder 2"/>
+          <p:cNvSpPr>
+            <a:spLocks noGrp="1"/>
+          </p:cNvSpPr>
+          <p:nvPr>
+            <p:ph idx="1"/>
+          </p:nvPr>
+        </p:nvSpPr>
+        <p:spPr/>
+        <p:txBody>
+          <a:bodyPr/>
+          <a:lstStyle/>
+          <a:p>
+            <a:r>
+              <a:t>Use BaaS when:</a:t>
+            </a:r>
+          </a:p>
+          <a:p>
+            <a:r>
+              <a:t>• MVP / startup</a:t>
+            </a:r>
+          </a:p>
+          <a:p>
+            <a:r>
+              <a:t>• Small team</a:t>
+            </a:r>
+          </a:p>
+          <a:p>
+            <a:r>
+              <a:t>• Need rapid deployment</a:t>
+            </a:r>
+          </a:p>
+          <a:p>
+            <a:endParaRPr/>
+          </a:p>
+          <a:p>
+            <a:r>
+              <a:t>Use custom backend when:</a:t>
+            </a:r>
+          </a:p>
+          <a:p>
+            <a:r>
+              <a:t>• Complex business logic</a:t>
+            </a:r>
+          </a:p>
+          <a:p>
+            <a:r>
+              <a:t>• Deep infrastructure control required</a:t>
+            </a:r>
+          </a:p>
+        </p:txBody>
+      </p:sp>
+    </p:spTree>
+  </p:cSld>
+  <p:clrMapOvr>
+    <a:masterClrMapping/>
+  </p:clrMapOvr>
+</p:sld>
+</file>
+
+<file path=ppt/slides/slide53.xml><?xml version="1.0" encoding="utf-8"?>
+<p:sld xmlns:a="http://schemas.openxmlformats.org/drawingml/2006/main" xmlns:r="http://schemas.openxmlformats.org/officeDocument/2006/relationships" xmlns:p="http://schemas.openxmlformats.org/presentationml/2006/main">
+  <p:cSld>
+    <p:spTree>
+      <p:nvGrpSpPr>
+        <p:cNvPr id="1" name=""/>
+        <p:cNvGrpSpPr/>
+        <p:nvPr/>
+      </p:nvGrpSpPr>
+      <p:grpSpPr>
+        <a:xfrm>
+          <a:off x="0" y="0"/>
+          <a:ext cx="0" cy="0"/>
+          <a:chOff x="0" y="0"/>
+          <a:chExt cx="0" cy="0"/>
+        </a:xfrm>
+      </p:grpSpPr>
+      <p:sp>
+        <p:nvSpPr>
+          <p:cNvPr id="2" name="Title 1"/>
+          <p:cNvSpPr>
+            <a:spLocks noGrp="1"/>
+          </p:cNvSpPr>
+          <p:nvPr>
+            <p:ph type="title"/>
+          </p:nvPr>
+        </p:nvSpPr>
+        <p:spPr/>
+        <p:txBody>
+          <a:bodyPr/>
+          <a:lstStyle/>
+          <a:p>
+            <a:r>
+              <a:t>Summary</a:t>
+            </a:r>
+          </a:p>
+        </p:txBody>
+      </p:sp>
+      <p:sp>
+        <p:nvSpPr>
+          <p:cNvPr id="3" name="Content Placeholder 2"/>
+          <p:cNvSpPr>
+            <a:spLocks noGrp="1"/>
+          </p:cNvSpPr>
+          <p:nvPr>
+            <p:ph idx="1"/>
+          </p:nvPr>
+        </p:nvSpPr>
+        <p:spPr/>
+        <p:txBody>
+          <a:bodyPr/>
+          <a:lstStyle/>
+          <a:p>
+            <a:r>
+              <a:t>BaaS = Managed backend infrastructure</a:t>
+            </a:r>
+          </a:p>
+          <a:p>
+            <a:endParaRPr/>
+          </a:p>
+          <a:p>
+            <a:r>
+              <a:t>Firebase → Fast, NoSQL</a:t>
+            </a:r>
+          </a:p>
+          <a:p>
+            <a:r>
+              <a:t>Supabase → SQL, Open-source</a:t>
+            </a:r>
+          </a:p>
+          <a:p>
+            <a:r>
+              <a:t>Amplify → AWS ecosystem integration</a:t>
+            </a:r>
+          </a:p>
+          <a:p>
+            <a:endParaRPr/>
+          </a:p>
+          <a:p>
+            <a:r>
+              <a:t>TypeScript = Safer, typed JavaScript</a:t>
+            </a:r>
+          </a:p>
+          <a:p>
+            <a:r>
+              <a:t>Ideal for modern React apps</a:t>
+            </a:r>
+          </a:p>
+        </p:txBody>
+      </p:sp>
+    </p:spTree>
   </p:cSld>
   <p:clrMapOvr>
     <a:masterClrMapping/>
